--- a/curso/pptx/S29.pptx
+++ b/curso/pptx/S29.pptx
@@ -3892,8 +3892,8 @@
         </p:nvSpPr>
         <p:spPr>
           <a:xfrm>
-            <a:off x="640000" y="420000"/>
-            <a:ext cx="10912000" cy="420000"/>
+            <a:off x="10652000" y="380000"/>
+            <a:ext cx="900000" cy="800000"/>
           </a:xfrm>
           <a:prstGeom prst="rect">
             <a:avLst/>
@@ -3908,17 +3908,17 @@
           <a:p>
             <a:pPr>
               <a:spcAft>
-                <a:spcPts val="810"/>
+                <a:spcPts val="1980"/>
               </a:spcAft>
             </a:pPr>
             <a:r>
-              <a:rPr sz="1800" b="1">
+              <a:rPr sz="4400" b="0">
                 <a:solidFill>
                   <a:srgbClr val="1F2A44"/>
                 </a:solidFill>
                 <a:latin typeface="Nunito Sans"/>
               </a:rPr>
-              <a:t>🦉 Aula de Filosofía</a:t>
+              <a:t>🙃</a:t>
             </a:r>
           </a:p>
         </p:txBody>

--- a/curso/pptx/S29.pptx
+++ b/curso/pptx/S29.pptx
@@ -473,426 +473,6 @@
     </a:lvl9pPr>
   </p:notesStyle>
 </p:notesMaster>
-</file>
-
-<file path=ppt/notesSlides/notesSlide1.xml><?xml version="1.0" encoding="utf-8"?>
-<p:notes xmlns:a="http://schemas.openxmlformats.org/drawingml/2006/main" xmlns:p="http://schemas.openxmlformats.org/presentationml/2006/main" xmlns:r="http://schemas.openxmlformats.org/officeDocument/2006/relationships">
-  <p:cSld>
-    <p:spTree>
-      <p:nvGrpSpPr>
-        <p:cNvPr id="1" name=""/>
-        <p:cNvGrpSpPr/>
-        <p:nvPr/>
-      </p:nvGrpSpPr>
-      <p:grpSpPr>
-        <a:xfrm>
-          <a:off x="0" y="0"/>
-          <a:ext cx="0" cy="0"/>
-          <a:chOff x="0" y="0"/>
-          <a:chExt cx="0" cy="0"/>
-        </a:xfrm>
-      </p:grpSpPr>
-      <p:sp>
-        <p:nvSpPr>
-          <p:cNvPr id="2" name="Slide Image Placeholder 1"/>
-          <p:cNvSpPr>
-            <a:spLocks noGrp="1"/>
-          </p:cNvSpPr>
-          <p:nvPr>
-            <p:ph type="sldImg" idx="2"/>
-          </p:nvPr>
-        </p:nvSpPr>
-        <p:spPr/>
-      </p:sp>
-      <p:sp>
-        <p:nvSpPr>
-          <p:cNvPr id="3" name="Notes Placeholder 2"/>
-          <p:cNvSpPr>
-            <a:spLocks noGrp="1"/>
-          </p:cNvSpPr>
-          <p:nvPr>
-            <p:ph type="body" idx="3" sz="quarter"/>
-          </p:nvPr>
-        </p:nvSpPr>
-        <p:spPr/>
-        <p:txBody>
-          <a:bodyPr/>
-          <a:lstStyle/>
-          <a:p>
-            <a:r>
-              <a:t>3 minutos. Sin apuntes. Es para recordar, no cuenta para nota.</a:t>
-            </a:r>
-          </a:p>
-        </p:txBody>
-      </p:sp>
-      <p:sp>
-        <p:nvSpPr>
-          <p:cNvPr id="4" name="Slide Number Placeholder 3"/>
-          <p:cNvSpPr>
-            <a:spLocks noGrp="1"/>
-          </p:cNvSpPr>
-          <p:nvPr>
-            <p:ph type="sldNum" idx="5" sz="quarter"/>
-          </p:nvPr>
-        </p:nvSpPr>
-        <p:spPr/>
-      </p:sp>
-    </p:spTree>
-  </p:cSld>
-  <p:clrMapOvr>
-    <a:masterClrMapping/>
-  </p:clrMapOvr>
-</p:notes>
-</file>
-
-<file path=ppt/notesSlides/notesSlide2.xml><?xml version="1.0" encoding="utf-8"?>
-<p:notes xmlns:a="http://schemas.openxmlformats.org/drawingml/2006/main" xmlns:p="http://schemas.openxmlformats.org/presentationml/2006/main" xmlns:r="http://schemas.openxmlformats.org/officeDocument/2006/relationships">
-  <p:cSld>
-    <p:spTree>
-      <p:nvGrpSpPr>
-        <p:cNvPr id="1" name=""/>
-        <p:cNvGrpSpPr/>
-        <p:nvPr/>
-      </p:nvGrpSpPr>
-      <p:grpSpPr>
-        <a:xfrm>
-          <a:off x="0" y="0"/>
-          <a:ext cx="0" cy="0"/>
-          <a:chOff x="0" y="0"/>
-          <a:chExt cx="0" cy="0"/>
-        </a:xfrm>
-      </p:grpSpPr>
-      <p:sp>
-        <p:nvSpPr>
-          <p:cNvPr id="2" name="Slide Image Placeholder 1"/>
-          <p:cNvSpPr>
-            <a:spLocks noGrp="1"/>
-          </p:cNvSpPr>
-          <p:nvPr>
-            <p:ph type="sldImg" idx="2"/>
-          </p:nvPr>
-        </p:nvSpPr>
-        <p:spPr/>
-      </p:sp>
-      <p:sp>
-        <p:nvSpPr>
-          <p:cNvPr id="3" name="Notes Placeholder 2"/>
-          <p:cNvSpPr>
-            <a:spLocks noGrp="1"/>
-          </p:cNvSpPr>
-          <p:nvPr>
-            <p:ph type="body" idx="3" sz="quarter"/>
-          </p:nvPr>
-        </p:nvSpPr>
-        <p:spPr/>
-        <p:txBody>
-          <a:bodyPr/>
-          <a:lstStyle/>
-          <a:p>
-            <a:r>
-              <a:t>3 minutos. Sin apuntes. Es para recordar, no cuenta para nota.</a:t>
-            </a:r>
-          </a:p>
-        </p:txBody>
-      </p:sp>
-      <p:sp>
-        <p:nvSpPr>
-          <p:cNvPr id="4" name="Slide Number Placeholder 3"/>
-          <p:cNvSpPr>
-            <a:spLocks noGrp="1"/>
-          </p:cNvSpPr>
-          <p:nvPr>
-            <p:ph type="sldNum" idx="5" sz="quarter"/>
-          </p:nvPr>
-        </p:nvSpPr>
-        <p:spPr/>
-      </p:sp>
-    </p:spTree>
-  </p:cSld>
-  <p:clrMapOvr>
-    <a:masterClrMapping/>
-  </p:clrMapOvr>
-</p:notes>
-</file>
-
-<file path=ppt/notesSlides/notesSlide3.xml><?xml version="1.0" encoding="utf-8"?>
-<p:notes xmlns:a="http://schemas.openxmlformats.org/drawingml/2006/main" xmlns:p="http://schemas.openxmlformats.org/presentationml/2006/main" xmlns:r="http://schemas.openxmlformats.org/officeDocument/2006/relationships">
-  <p:cSld>
-    <p:spTree>
-      <p:nvGrpSpPr>
-        <p:cNvPr id="1" name=""/>
-        <p:cNvGrpSpPr/>
-        <p:nvPr/>
-      </p:nvGrpSpPr>
-      <p:grpSpPr>
-        <a:xfrm>
-          <a:off x="0" y="0"/>
-          <a:ext cx="0" cy="0"/>
-          <a:chOff x="0" y="0"/>
-          <a:chExt cx="0" cy="0"/>
-        </a:xfrm>
-      </p:grpSpPr>
-      <p:sp>
-        <p:nvSpPr>
-          <p:cNvPr id="2" name="Slide Image Placeholder 1"/>
-          <p:cNvSpPr>
-            <a:spLocks noGrp="1"/>
-          </p:cNvSpPr>
-          <p:nvPr>
-            <p:ph type="sldImg" idx="2"/>
-          </p:nvPr>
-        </p:nvSpPr>
-        <p:spPr/>
-      </p:sp>
-      <p:sp>
-        <p:nvSpPr>
-          <p:cNvPr id="3" name="Notes Placeholder 2"/>
-          <p:cNvSpPr>
-            <a:spLocks noGrp="1"/>
-          </p:cNvSpPr>
-          <p:nvPr>
-            <p:ph type="body" idx="3" sz="quarter"/>
-          </p:nvPr>
-        </p:nvSpPr>
-        <p:spPr/>
-        <p:txBody>
-          <a:bodyPr/>
-          <a:lstStyle/>
-          <a:p>
-            <a:r>
-              <a:t>Nadie tiene que contestar: solo pensarlo.</a:t>
-            </a:r>
-          </a:p>
-        </p:txBody>
-      </p:sp>
-      <p:sp>
-        <p:nvSpPr>
-          <p:cNvPr id="4" name="Slide Number Placeholder 3"/>
-          <p:cNvSpPr>
-            <a:spLocks noGrp="1"/>
-          </p:cNvSpPr>
-          <p:nvPr>
-            <p:ph type="sldNum" idx="5" sz="quarter"/>
-          </p:nvPr>
-        </p:nvSpPr>
-        <p:spPr/>
-      </p:sp>
-    </p:spTree>
-  </p:cSld>
-  <p:clrMapOvr>
-    <a:masterClrMapping/>
-  </p:clrMapOvr>
-</p:notes>
-</file>
-
-<file path=ppt/notesSlides/notesSlide4.xml><?xml version="1.0" encoding="utf-8"?>
-<p:notes xmlns:a="http://schemas.openxmlformats.org/drawingml/2006/main" xmlns:p="http://schemas.openxmlformats.org/presentationml/2006/main" xmlns:r="http://schemas.openxmlformats.org/officeDocument/2006/relationships">
-  <p:cSld>
-    <p:spTree>
-      <p:nvGrpSpPr>
-        <p:cNvPr id="1" name=""/>
-        <p:cNvGrpSpPr/>
-        <p:nvPr/>
-      </p:nvGrpSpPr>
-      <p:grpSpPr>
-        <a:xfrm>
-          <a:off x="0" y="0"/>
-          <a:ext cx="0" cy="0"/>
-          <a:chOff x="0" y="0"/>
-          <a:chExt cx="0" cy="0"/>
-        </a:xfrm>
-      </p:grpSpPr>
-      <p:sp>
-        <p:nvSpPr>
-          <p:cNvPr id="2" name="Slide Image Placeholder 1"/>
-          <p:cNvSpPr>
-            <a:spLocks noGrp="1"/>
-          </p:cNvSpPr>
-          <p:nvPr>
-            <p:ph type="sldImg" idx="2"/>
-          </p:nvPr>
-        </p:nvSpPr>
-        <p:spPr/>
-      </p:sp>
-      <p:sp>
-        <p:nvSpPr>
-          <p:cNvPr id="3" name="Notes Placeholder 2"/>
-          <p:cNvSpPr>
-            <a:spLocks noGrp="1"/>
-          </p:cNvSpPr>
-          <p:nvPr>
-            <p:ph type="body" idx="3" sz="quarter"/>
-          </p:nvPr>
-        </p:nvSpPr>
-        <p:spPr/>
-        <p:txBody>
-          <a:bodyPr/>
-          <a:lstStyle/>
-          <a:p>
-            <a:r>
-              <a:t>Dejar unos segundos para que piensen la respuesta fácil antes de enseñar los pasos.</a:t>
-            </a:r>
-          </a:p>
-        </p:txBody>
-      </p:sp>
-      <p:sp>
-        <p:nvSpPr>
-          <p:cNvPr id="4" name="Slide Number Placeholder 3"/>
-          <p:cNvSpPr>
-            <a:spLocks noGrp="1"/>
-          </p:cNvSpPr>
-          <p:nvPr>
-            <p:ph type="sldNum" idx="5" sz="quarter"/>
-          </p:nvPr>
-        </p:nvSpPr>
-        <p:spPr/>
-      </p:sp>
-    </p:spTree>
-  </p:cSld>
-  <p:clrMapOvr>
-    <a:masterClrMapping/>
-  </p:clrMapOvr>
-</p:notes>
-</file>
-
-<file path=ppt/notesSlides/notesSlide5.xml><?xml version="1.0" encoding="utf-8"?>
-<p:notes xmlns:a="http://schemas.openxmlformats.org/drawingml/2006/main" xmlns:p="http://schemas.openxmlformats.org/presentationml/2006/main" xmlns:r="http://schemas.openxmlformats.org/officeDocument/2006/relationships">
-  <p:cSld>
-    <p:spTree>
-      <p:nvGrpSpPr>
-        <p:cNvPr id="1" name=""/>
-        <p:cNvGrpSpPr/>
-        <p:nvPr/>
-      </p:nvGrpSpPr>
-      <p:grpSpPr>
-        <a:xfrm>
-          <a:off x="0" y="0"/>
-          <a:ext cx="0" cy="0"/>
-          <a:chOff x="0" y="0"/>
-          <a:chExt cx="0" cy="0"/>
-        </a:xfrm>
-      </p:grpSpPr>
-      <p:sp>
-        <p:nvSpPr>
-          <p:cNvPr id="2" name="Slide Image Placeholder 1"/>
-          <p:cNvSpPr>
-            <a:spLocks noGrp="1"/>
-          </p:cNvSpPr>
-          <p:nvPr>
-            <p:ph type="sldImg" idx="2"/>
-          </p:nvPr>
-        </p:nvSpPr>
-        <p:spPr/>
-      </p:sp>
-      <p:sp>
-        <p:nvSpPr>
-          <p:cNvPr id="3" name="Notes Placeholder 2"/>
-          <p:cNvSpPr>
-            <a:spLocks noGrp="1"/>
-          </p:cNvSpPr>
-          <p:nvPr>
-            <p:ph type="body" idx="3" sz="quarter"/>
-          </p:nvPr>
-        </p:nvSpPr>
-        <p:spPr/>
-        <p:txBody>
-          <a:bodyPr/>
-          <a:lstStyle/>
-          <a:p>
-            <a:r>
-              <a:t>Dejar 2 minutos para que lo escriban. La diapositiva siguiente muestra el resumen.</a:t>
-            </a:r>
-          </a:p>
-        </p:txBody>
-      </p:sp>
-      <p:sp>
-        <p:nvSpPr>
-          <p:cNvPr id="4" name="Slide Number Placeholder 3"/>
-          <p:cNvSpPr>
-            <a:spLocks noGrp="1"/>
-          </p:cNvSpPr>
-          <p:nvPr>
-            <p:ph type="sldNum" idx="5" sz="quarter"/>
-          </p:nvPr>
-        </p:nvSpPr>
-        <p:spPr/>
-      </p:sp>
-    </p:spTree>
-  </p:cSld>
-  <p:clrMapOvr>
-    <a:masterClrMapping/>
-  </p:clrMapOvr>
-</p:notes>
-</file>
-
-<file path=ppt/notesSlides/notesSlide6.xml><?xml version="1.0" encoding="utf-8"?>
-<p:notes xmlns:a="http://schemas.openxmlformats.org/drawingml/2006/main" xmlns:p="http://schemas.openxmlformats.org/presentationml/2006/main" xmlns:r="http://schemas.openxmlformats.org/officeDocument/2006/relationships">
-  <p:cSld>
-    <p:spTree>
-      <p:nvGrpSpPr>
-        <p:cNvPr id="1" name=""/>
-        <p:cNvGrpSpPr/>
-        <p:nvPr/>
-      </p:nvGrpSpPr>
-      <p:grpSpPr>
-        <a:xfrm>
-          <a:off x="0" y="0"/>
-          <a:ext cx="0" cy="0"/>
-          <a:chOff x="0" y="0"/>
-          <a:chExt cx="0" cy="0"/>
-        </a:xfrm>
-      </p:grpSpPr>
-      <p:sp>
-        <p:nvSpPr>
-          <p:cNvPr id="2" name="Slide Image Placeholder 1"/>
-          <p:cNvSpPr>
-            <a:spLocks noGrp="1"/>
-          </p:cNvSpPr>
-          <p:nvPr>
-            <p:ph type="sldImg" idx="2"/>
-          </p:nvPr>
-        </p:nvSpPr>
-        <p:spPr/>
-      </p:sp>
-      <p:sp>
-        <p:nvSpPr>
-          <p:cNvPr id="3" name="Notes Placeholder 2"/>
-          <p:cNvSpPr>
-            <a:spLocks noGrp="1"/>
-          </p:cNvSpPr>
-          <p:nvPr>
-            <p:ph type="body" idx="3" sz="quarter"/>
-          </p:nvPr>
-        </p:nvSpPr>
-        <p:spPr/>
-        <p:txBody>
-          <a:bodyPr/>
-          <a:lstStyle/>
-          <a:p>
-            <a:r>
-              <a:t>Buscar: «experimento de Asch conformidad» · «experimento de Milgram explicado»</a:t>
-            </a:r>
-          </a:p>
-        </p:txBody>
-      </p:sp>
-      <p:sp>
-        <p:nvSpPr>
-          <p:cNvPr id="4" name="Slide Number Placeholder 3"/>
-          <p:cNvSpPr>
-            <a:spLocks noGrp="1"/>
-          </p:cNvSpPr>
-          <p:nvPr>
-            <p:ph type="sldNum" idx="5" sz="quarter"/>
-          </p:nvPr>
-        </p:nvSpPr>
-        <p:spPr/>
-      </p:sp>
-    </p:spTree>
-  </p:cSld>
-  <p:clrMapOvr>
-    <a:masterClrMapping/>
-  </p:clrMapOvr>
-</p:notes>
 </file>
 
 <file path=ppt/slideLayouts/slideLayout1.xml><?xml version="1.0" encoding="utf-8"?>

--- a/curso/pptx/S29.pptx
+++ b/curso/pptx/S29.pptx
@@ -5274,7 +5274,7 @@
                 </a:solidFill>
                 <a:latin typeface="Nunito Sans"/>
               </a:rPr>
-              <a:t>Suena la alarma del simulacro. El profesor dice: «En fila, por la escalera B». Todos salen en fila. Maialen también, sin discutir.</a:t>
+              <a:t>Suena la alarma del simulacro. El profesor dice: «En fila, por la escalera B». Todos salen en fila. Una chica también, sin discutir.</a:t>
             </a:r>
           </a:p>
         </p:txBody>

--- a/curso/pptx/S29.pptx
+++ b/curso/pptx/S29.pptx
@@ -3537,7 +3537,7 @@
                 </a:solidFill>
                 <a:latin typeface="Nunito Sans"/>
               </a:rPr>
-              <a:t>PENSAMIENTO CRÍTICO · SESIÓN 29 · UNIDAD 5 · AUTORIDAD E INFLUENCIA</a:t>
+              <a:t>PENSAMIENTO CRÍTICO · SESIÓN 29 · UNIDAD 5 · FALACIAS II: RAZONAR MAL</a:t>
             </a:r>
           </a:p>
         </p:txBody>
@@ -3576,7 +3576,7 @@
                 </a:solidFill>
                 <a:latin typeface="Fredoka"/>
               </a:rPr>
-              <a:t>Obedecer y seguir al grupo</a:t>
+              <a:t>Ignorancia y razonamiento circular</a:t>
             </a:r>
           </a:p>
         </p:txBody>
@@ -3615,7 +3615,7 @@
                 </a:solidFill>
                 <a:latin typeface="Nunito Sans"/>
               </a:rPr>
-              <a:t>Los experimentos de Asch y Milgram muestran que el grupo y la autoridad pueden hacernos actuar contra lo que pensamos.</a:t>
+              <a:t>No saber que algo es falso no lo hace verdadero, y una conclusión escondida en la premisa no demuestra nada.</a:t>
             </a:r>
           </a:p>
         </p:txBody>
@@ -3680,7 +3680,7 @@
                 </a:solidFill>
                 <a:latin typeface="Nunito Sans"/>
               </a:rPr>
-              <a:t>BLOQUE 2 · MILGRAM: OBEDECER A UNA AUTORIDAD (1961-1962)</a:t>
+              <a:t>BLOQUE 2 · CASOS RESUELTOS</a:t>
             </a:r>
           </a:p>
         </p:txBody>
@@ -3719,7 +3719,7 @@
                 </a:solidFill>
                 <a:latin typeface="Fredoka"/>
               </a:rPr>
-              <a:t>Así era el experimento de Milgram</a:t>
+              <a:t>Caso 1 · Los fantasmas</a:t>
             </a:r>
           </a:p>
         </p:txBody>
@@ -3801,7 +3801,7 @@
                 </a:solidFill>
                 <a:latin typeface="Nunito Sans"/>
               </a:rPr>
-              <a:t>Stanley Milgram, psicólogo de la Universidad de Yale (Estados Unidos), dijo a unos voluntarios que estudiaba cómo afecta el castigo a la memoria.</a:t>
+              <a:t>«Los fantasmas existen: nadie ha demostrado nunca que no existan.»</a:t>
             </a:r>
           </a:p>
         </p:txBody>
@@ -3849,16 +3849,48 @@
                 </a:solidFill>
                 <a:latin typeface="Nunito Sans"/>
               </a:rPr>
-              <a:t>El voluntario era el «</a:t>
-            </a:r>
+              <a:t>¿Cuál es la conclusión? Los fantasmas existen.</a:t>
+            </a:r>
+          </a:p>
+          <a:p>
+            <a:pPr>
+              <a:spcAft>
+                <a:spcPts val="1080"/>
+              </a:spcAft>
+            </a:pPr>
             <a:r>
               <a:rPr sz="2400" b="1">
                 <a:solidFill>
+                  <a:srgbClr val="E8793A"/>
+                </a:solidFill>
+                <a:latin typeface="Nunito Sans"/>
+              </a:rPr>
+              <a:t>2. </a:t>
+            </a:r>
+            <a:r>
+              <a:rPr sz="2400" b="0">
+                <a:solidFill>
                   <a:srgbClr val="1F2A44"/>
                 </a:solidFill>
                 <a:latin typeface="Nunito Sans"/>
               </a:rPr>
-              <a:t>maestro</a:t>
+              <a:t>¿Qué razón da? Nadie ha demostrado que no existan.</a:t>
+            </a:r>
+          </a:p>
+          <a:p>
+            <a:pPr>
+              <a:spcAft>
+                <a:spcPts val="1080"/>
+              </a:spcAft>
+            </a:pPr>
+            <a:r>
+              <a:rPr sz="2400" b="1">
+                <a:solidFill>
+                  <a:srgbClr val="E8793A"/>
+                </a:solidFill>
+                <a:latin typeface="Nunito Sans"/>
+              </a:rPr>
+              <a:t>3. </a:t>
             </a:r>
             <a:r>
               <a:rPr sz="2400" b="0">
@@ -3867,136 +3899,32 @@
                 </a:solidFill>
                 <a:latin typeface="Nunito Sans"/>
               </a:rPr>
-              <a:t>». El «</a:t>
-            </a:r>
+              <a:t>¿Es una prueba a favor? No: solo dice que no sabemos. Así se podría «demostrar» cualquier cosa.</a:t>
+            </a:r>
+          </a:p>
+          <a:p>
+            <a:pPr>
+              <a:spcAft>
+                <a:spcPts val="1080"/>
+              </a:spcAft>
+            </a:pPr>
             <a:r>
               <a:rPr sz="2400" b="1">
                 <a:solidFill>
+                  <a:srgbClr val="E8793A"/>
+                </a:solidFill>
+                <a:latin typeface="Nunito Sans"/>
+              </a:rPr>
+              <a:t>4. </a:t>
+            </a:r>
+            <a:r>
+              <a:rPr sz="2400" b="0">
+                <a:solidFill>
                   <a:srgbClr val="1F2A44"/>
                 </a:solidFill>
                 <a:latin typeface="Nunito Sans"/>
               </a:rPr>
-              <a:t>alumno</a:t>
-            </a:r>
-            <a:r>
-              <a:rPr sz="2400" b="0">
-                <a:solidFill>
-                  <a:srgbClr val="1F2A44"/>
-                </a:solidFill>
-                <a:latin typeface="Nunito Sans"/>
-              </a:rPr>
-              <a:t>», atado a una silla en otra sala, era un actor.</a:t>
-            </a:r>
-          </a:p>
-          <a:p>
-            <a:pPr>
-              <a:spcAft>
-                <a:spcPts val="1080"/>
-              </a:spcAft>
-            </a:pPr>
-            <a:r>
-              <a:rPr sz="2400" b="1">
-                <a:solidFill>
-                  <a:srgbClr val="E8793A"/>
-                </a:solidFill>
-                <a:latin typeface="Nunito Sans"/>
-              </a:rPr>
-              <a:t>2. </a:t>
-            </a:r>
-            <a:r>
-              <a:rPr sz="2400" b="0">
-                <a:solidFill>
-                  <a:srgbClr val="1F2A44"/>
-                </a:solidFill>
-                <a:latin typeface="Nunito Sans"/>
-              </a:rPr>
-              <a:t>Por cada error, el maestro daba una descarga eléctrica cada vez más fuerte. Las descargas eran </a:t>
-            </a:r>
-            <a:r>
-              <a:rPr sz="2400" b="1">
-                <a:solidFill>
-                  <a:srgbClr val="1F2A44"/>
-                </a:solidFill>
-                <a:latin typeface="Nunito Sans"/>
-              </a:rPr>
-              <a:t>falsas</a:t>
-            </a:r>
-            <a:r>
-              <a:rPr sz="2400" b="0">
-                <a:solidFill>
-                  <a:srgbClr val="1F2A44"/>
-                </a:solidFill>
-                <a:latin typeface="Nunito Sans"/>
-              </a:rPr>
-              <a:t>, pero él no lo sabía.</a:t>
-            </a:r>
-          </a:p>
-          <a:p>
-            <a:pPr>
-              <a:spcAft>
-                <a:spcPts val="1080"/>
-              </a:spcAft>
-            </a:pPr>
-            <a:r>
-              <a:rPr sz="2400" b="1">
-                <a:solidFill>
-                  <a:srgbClr val="E8793A"/>
-                </a:solidFill>
-                <a:latin typeface="Nunito Sans"/>
-              </a:rPr>
-              <a:t>3. </a:t>
-            </a:r>
-            <a:r>
-              <a:rPr sz="2400" b="0">
-                <a:solidFill>
-                  <a:srgbClr val="1F2A44"/>
-                </a:solidFill>
-                <a:latin typeface="Nunito Sans"/>
-              </a:rPr>
-              <a:t>El actor protestaba, golpeaba la pared y al final dejaba de contestar. Si el maestro dudaba, el científico decía: «Continúe, por favor».</a:t>
-            </a:r>
-          </a:p>
-          <a:p>
-            <a:pPr>
-              <a:spcAft>
-                <a:spcPts val="1080"/>
-              </a:spcAft>
-            </a:pPr>
-            <a:r>
-              <a:rPr sz="2400" b="1">
-                <a:solidFill>
-                  <a:srgbClr val="E8793A"/>
-                </a:solidFill>
-                <a:latin typeface="Nunito Sans"/>
-              </a:rPr>
-              <a:t>4. </a:t>
-            </a:r>
-            <a:r>
-              <a:rPr sz="2400" b="0">
-                <a:solidFill>
-                  <a:srgbClr val="1F2A44"/>
-                </a:solidFill>
-                <a:latin typeface="Nunito Sans"/>
-              </a:rPr>
-              <a:t>Conclusión: en la versión más conocida, el </a:t>
-            </a:r>
-            <a:r>
-              <a:rPr sz="2400" b="1">
-                <a:solidFill>
-                  <a:srgbClr val="1F2A44"/>
-                </a:solidFill>
-                <a:latin typeface="Nunito Sans"/>
-              </a:rPr>
-              <a:t>65 %</a:t>
-            </a:r>
-            <a:r>
-              <a:rPr sz="2400" b="0">
-                <a:solidFill>
-                  <a:srgbClr val="1F2A44"/>
-                </a:solidFill>
-                <a:latin typeface="Nunito Sans"/>
-              </a:rPr>
-              <a:t> llegó hasta la descarga más fuerte, de 450 voltios.</a:t>
+              <a:t>Conclusión: apelación a la ignorancia. Quien dice que existen tiene que dar pruebas.</a:t>
             </a:r>
           </a:p>
         </p:txBody>
@@ -4061,7 +3989,7 @@
                 </a:solidFill>
                 <a:latin typeface="Nunito Sans"/>
               </a:rPr>
-              <a:t>BLOQUE 2 · MILGRAM: OBEDECER A UNA AUTORIDAD (1961-1962)</a:t>
+              <a:t>BLOQUE 2 · CASOS RESUELTOS</a:t>
             </a:r>
           </a:p>
         </p:txBody>
@@ -4100,21 +4028,103 @@
                 </a:solidFill>
                 <a:latin typeface="Fredoka"/>
               </a:rPr>
-              <a:t>Las críticas al experimento de Milgram</a:t>
-            </a:r>
-          </a:p>
-        </p:txBody>
-      </p:sp>
-      <p:sp>
-        <p:nvSpPr>
-          <p:cNvPr id="4" name="TextBox 3"/>
+              <a:t>Caso 2 · Una acusación</a:t>
+            </a:r>
+          </a:p>
+        </p:txBody>
+      </p:sp>
+      <p:sp>
+        <p:nvSpPr>
+          <p:cNvPr id="4" name="Rectangle 3"/>
+          <p:cNvSpPr/>
+          <p:nvPr/>
+        </p:nvSpPr>
+        <p:spPr>
+          <a:xfrm>
+            <a:off x="640000" y="1600000"/>
+            <a:ext cx="10912000" cy="1100000"/>
+          </a:xfrm>
+          <a:prstGeom prst="rect">
+            <a:avLst/>
+          </a:prstGeom>
+          <a:solidFill>
+            <a:srgbClr val="FFFFFF"/>
+          </a:solidFill>
+          <a:ln>
+            <a:noFill/>
+          </a:ln>
+        </p:spPr>
+        <p:style>
+          <a:lnRef idx="1">
+            <a:schemeClr val="accent1"/>
+          </a:lnRef>
+          <a:fillRef idx="3">
+            <a:schemeClr val="accent1"/>
+          </a:fillRef>
+          <a:effectRef idx="2">
+            <a:schemeClr val="accent1"/>
+          </a:effectRef>
+          <a:fontRef idx="minor">
+            <a:schemeClr val="lt1"/>
+          </a:fontRef>
+        </p:style>
+        <p:txBody>
+          <a:bodyPr rtlCol="0" anchor="ctr"/>
+          <a:lstStyle/>
+          <a:p>
+            <a:pPr algn="ctr"/>
+          </a:p>
+        </p:txBody>
+      </p:sp>
+      <p:sp>
+        <p:nvSpPr>
+          <p:cNvPr id="5" name="TextBox 4"/>
           <p:cNvSpPr txBox="1"/>
           <p:nvPr/>
         </p:nvSpPr>
         <p:spPr>
           <a:xfrm>
-            <a:off x="640000" y="1650000"/>
-            <a:ext cx="10912000" cy="4808000"/>
+            <a:off x="840000" y="1650000"/>
+            <a:ext cx="10512000" cy="1000000"/>
+          </a:xfrm>
+          <a:prstGeom prst="rect">
+            <a:avLst/>
+          </a:prstGeom>
+          <a:noFill/>
+        </p:spPr>
+        <p:txBody>
+          <a:bodyPr wrap="square" anchor="ctr">
+            <a:spAutoFit/>
+          </a:bodyPr>
+          <a:lstStyle/>
+          <a:p>
+            <a:pPr>
+              <a:spcAft>
+                <a:spcPts val="1170"/>
+              </a:spcAft>
+            </a:pPr>
+            <a:r>
+              <a:rPr sz="2600" b="1">
+                <a:solidFill>
+                  <a:srgbClr val="1F2A44"/>
+                </a:solidFill>
+                <a:latin typeface="Nunito Sans"/>
+              </a:rPr>
+              <a:t>Un chico: «Seguro que un compañero copió en el examen. Nadie puede demostrar que no copiara».</a:t>
+            </a:r>
+          </a:p>
+        </p:txBody>
+      </p:sp>
+      <p:sp>
+        <p:nvSpPr>
+          <p:cNvPr id="6" name="TextBox 5"/>
+          <p:cNvSpPr txBox="1"/>
+          <p:nvPr/>
+        </p:nvSpPr>
+        <p:spPr>
+          <a:xfrm>
+            <a:off x="640000" y="2900000"/>
+            <a:ext cx="10912000" cy="3500000"/>
           </a:xfrm>
           <a:prstGeom prst="rect">
             <a:avLst/>
@@ -4129,164 +4139,101 @@
           <a:p>
             <a:pPr>
               <a:spcAft>
-                <a:spcPts val="1260"/>
-              </a:spcAft>
-            </a:pPr>
-            <a:r>
-              <a:rPr sz="2800" b="1">
+                <a:spcPts val="1080"/>
+              </a:spcAft>
+            </a:pPr>
+            <a:r>
+              <a:rPr sz="2400" b="1">
                 <a:solidFill>
                   <a:srgbClr val="E8793A"/>
                 </a:solidFill>
                 <a:latin typeface="Nunito Sans"/>
               </a:rPr>
-              <a:t>• </a:t>
-            </a:r>
-            <a:r>
-              <a:rPr sz="2800" b="0">
+              <a:t>1. </a:t>
+            </a:r>
+            <a:r>
+              <a:rPr sz="2400" b="0">
                 <a:solidFill>
                   <a:srgbClr val="1F2A44"/>
                 </a:solidFill>
                 <a:latin typeface="Nunito Sans"/>
               </a:rPr>
-              <a:t>Los voluntarios </a:t>
-            </a:r>
-            <a:r>
-              <a:rPr sz="2800" b="1">
+              <a:t>¿Qué razón da ese chico? Que nadie puede demostrar lo contrario.</a:t>
+            </a:r>
+          </a:p>
+          <a:p>
+            <a:pPr>
+              <a:spcAft>
+                <a:spcPts val="1080"/>
+              </a:spcAft>
+            </a:pPr>
+            <a:r>
+              <a:rPr sz="2400" b="1">
+                <a:solidFill>
+                  <a:srgbClr val="E8793A"/>
+                </a:solidFill>
+                <a:latin typeface="Nunito Sans"/>
+              </a:rPr>
+              <a:t>2. </a:t>
+            </a:r>
+            <a:r>
+              <a:rPr sz="2400" b="0">
                 <a:solidFill>
                   <a:srgbClr val="1F2A44"/>
                 </a:solidFill>
                 <a:latin typeface="Nunito Sans"/>
               </a:rPr>
-              <a:t>sufrieron</a:t>
-            </a:r>
-            <a:r>
-              <a:rPr sz="2800" b="0">
+              <a:t>¿Qué pruebas hay de que copió? Ninguna.</a:t>
+            </a:r>
+          </a:p>
+          <a:p>
+            <a:pPr>
+              <a:spcAft>
+                <a:spcPts val="1080"/>
+              </a:spcAft>
+            </a:pPr>
+            <a:r>
+              <a:rPr sz="2400" b="1">
+                <a:solidFill>
+                  <a:srgbClr val="E8793A"/>
+                </a:solidFill>
+                <a:latin typeface="Nunito Sans"/>
+              </a:rPr>
+              <a:t>3. </a:t>
+            </a:r>
+            <a:r>
+              <a:rPr sz="2400" b="0">
                 <a:solidFill>
                   <a:srgbClr val="1F2A44"/>
                 </a:solidFill>
                 <a:latin typeface="Nunito Sans"/>
               </a:rPr>
-              <a:t>: sudaban, temblaban, algunos tenían ataques de risa nerviosa</a:t>
-            </a:r>
-          </a:p>
-          <a:p>
-            <a:pPr>
-              <a:spcAft>
-                <a:spcPts val="1260"/>
-              </a:spcAft>
-            </a:pPr>
-            <a:r>
-              <a:rPr sz="2800" b="1">
+              <a:t>Así se puede acusar a cualquiera de cualquier cosa.</a:t>
+            </a:r>
+          </a:p>
+          <a:p>
+            <a:pPr>
+              <a:spcAft>
+                <a:spcPts val="1080"/>
+              </a:spcAft>
+            </a:pPr>
+            <a:r>
+              <a:rPr sz="2400" b="1">
                 <a:solidFill>
                   <a:srgbClr val="E8793A"/>
                 </a:solidFill>
                 <a:latin typeface="Nunito Sans"/>
               </a:rPr>
-              <a:t>• </a:t>
-            </a:r>
-            <a:r>
-              <a:rPr sz="2800" b="0">
+              <a:t>4. </a:t>
+            </a:r>
+            <a:r>
+              <a:rPr sz="2400" b="0">
                 <a:solidFill>
                   <a:srgbClr val="1F2A44"/>
                 </a:solidFill>
                 <a:latin typeface="Nunito Sans"/>
               </a:rPr>
-              <a:t>Los </a:t>
-            </a:r>
-            <a:r>
-              <a:rPr sz="2800" b="1">
-                <a:solidFill>
-                  <a:srgbClr val="1F2A44"/>
-                </a:solidFill>
-                <a:latin typeface="Nunito Sans"/>
-              </a:rPr>
-              <a:t>engañaron</a:t>
-            </a:r>
-            <a:r>
-              <a:rPr sz="2800" b="0">
-                <a:solidFill>
-                  <a:srgbClr val="1F2A44"/>
-                </a:solidFill>
-                <a:latin typeface="Nunito Sans"/>
-              </a:rPr>
-              <a:t>: no sabían de qué iba de verdad</a:t>
-            </a:r>
-          </a:p>
-          <a:p>
-            <a:pPr>
-              <a:spcAft>
-                <a:spcPts val="1260"/>
-              </a:spcAft>
-            </a:pPr>
-            <a:r>
-              <a:rPr sz="2800" b="1">
-                <a:solidFill>
-                  <a:srgbClr val="E8793A"/>
-                </a:solidFill>
-                <a:latin typeface="Nunito Sans"/>
-              </a:rPr>
-              <a:t>• </a:t>
-            </a:r>
-            <a:r>
-              <a:rPr sz="2800" b="0">
-                <a:solidFill>
-                  <a:srgbClr val="1F2A44"/>
-                </a:solidFill>
-                <a:latin typeface="Nunito Sans"/>
-              </a:rPr>
-              <a:t>Era muy difícil </a:t>
-            </a:r>
-            <a:r>
-              <a:rPr sz="2800" b="1">
-                <a:solidFill>
-                  <a:srgbClr val="1F2A44"/>
-                </a:solidFill>
-                <a:latin typeface="Nunito Sans"/>
-              </a:rPr>
-              <a:t>dejarlo</a:t>
-            </a:r>
-            <a:r>
-              <a:rPr sz="2800" b="0">
-                <a:solidFill>
-                  <a:srgbClr val="1F2A44"/>
-                </a:solidFill>
-                <a:latin typeface="Nunito Sans"/>
-              </a:rPr>
-              <a:t>: el científico insistía</a:t>
-            </a:r>
-          </a:p>
-          <a:p>
-            <a:pPr>
-              <a:spcAft>
-                <a:spcPts val="1260"/>
-              </a:spcAft>
-            </a:pPr>
-            <a:r>
-              <a:rPr sz="2800" b="1">
-                <a:solidFill>
-                  <a:srgbClr val="E8793A"/>
-                </a:solidFill>
-                <a:latin typeface="Nunito Sans"/>
-              </a:rPr>
-              <a:t>• </a:t>
-            </a:r>
-            <a:r>
-              <a:rPr sz="2800" b="0">
-                <a:solidFill>
-                  <a:srgbClr val="1F2A44"/>
-                </a:solidFill>
-                <a:latin typeface="Nunito Sans"/>
-              </a:rPr>
-              <a:t>Hoy un experimento así, entero, </a:t>
-            </a:r>
-            <a:r>
-              <a:rPr sz="2800" b="1">
-                <a:solidFill>
-                  <a:srgbClr val="1F2A44"/>
-                </a:solidFill>
-                <a:latin typeface="Nunito Sans"/>
-              </a:rPr>
-              <a:t>no estaría permitido</a:t>
+              <a:t>Conclusión: apelación a la ignorancia. Acusar sin pruebas, además, es injusto.</a:t>
             </a:r>
           </a:p>
         </p:txBody>
@@ -4351,7 +4298,7 @@
                 </a:solidFill>
                 <a:latin typeface="Nunito Sans"/>
               </a:rPr>
-              <a:t>BLOQUE 2 · MILGRAM: OBEDECER A UNA AUTORIDAD (1961-1962)</a:t>
+              <a:t>BLOQUE 2 · CASOS RESUELTOS</a:t>
             </a:r>
           </a:p>
         </p:txBody>
@@ -4390,21 +4337,103 @@
                 </a:solidFill>
                 <a:latin typeface="Fredoka"/>
               </a:rPr>
-              <a:t>Lo que todavía se discute</a:t>
-            </a:r>
-          </a:p>
-        </p:txBody>
-      </p:sp>
-      <p:sp>
-        <p:nvSpPr>
-          <p:cNvPr id="4" name="TextBox 3"/>
+              <a:t>Caso 3 · La app que no miente</a:t>
+            </a:r>
+          </a:p>
+        </p:txBody>
+      </p:sp>
+      <p:sp>
+        <p:nvSpPr>
+          <p:cNvPr id="4" name="Rectangle 3"/>
+          <p:cNvSpPr/>
+          <p:nvPr/>
+        </p:nvSpPr>
+        <p:spPr>
+          <a:xfrm>
+            <a:off x="640000" y="1600000"/>
+            <a:ext cx="10912000" cy="1100000"/>
+          </a:xfrm>
+          <a:prstGeom prst="rect">
+            <a:avLst/>
+          </a:prstGeom>
+          <a:solidFill>
+            <a:srgbClr val="FFFFFF"/>
+          </a:solidFill>
+          <a:ln>
+            <a:noFill/>
+          </a:ln>
+        </p:spPr>
+        <p:style>
+          <a:lnRef idx="1">
+            <a:schemeClr val="accent1"/>
+          </a:lnRef>
+          <a:fillRef idx="3">
+            <a:schemeClr val="accent1"/>
+          </a:fillRef>
+          <a:effectRef idx="2">
+            <a:schemeClr val="accent1"/>
+          </a:effectRef>
+          <a:fontRef idx="minor">
+            <a:schemeClr val="lt1"/>
+          </a:fontRef>
+        </p:style>
+        <p:txBody>
+          <a:bodyPr rtlCol="0" anchor="ctr"/>
+          <a:lstStyle/>
+          <a:p>
+            <a:pPr algn="ctr"/>
+          </a:p>
+        </p:txBody>
+      </p:sp>
+      <p:sp>
+        <p:nvSpPr>
+          <p:cNvPr id="5" name="TextBox 4"/>
           <p:cNvSpPr txBox="1"/>
           <p:nvPr/>
         </p:nvSpPr>
         <p:spPr>
           <a:xfrm>
-            <a:off x="640000" y="1650000"/>
-            <a:ext cx="10912000" cy="4808000"/>
+            <a:off x="840000" y="1650000"/>
+            <a:ext cx="10512000" cy="1000000"/>
+          </a:xfrm>
+          <a:prstGeom prst="rect">
+            <a:avLst/>
+          </a:prstGeom>
+          <a:noFill/>
+        </p:spPr>
+        <p:txBody>
+          <a:bodyPr wrap="square" anchor="ctr">
+            <a:spAutoFit/>
+          </a:bodyPr>
+          <a:lstStyle/>
+          <a:p>
+            <a:pPr>
+              <a:spcAft>
+                <a:spcPts val="1170"/>
+              </a:spcAft>
+            </a:pPr>
+            <a:r>
+              <a:rPr sz="2600" b="1">
+                <a:solidFill>
+                  <a:srgbClr val="1F2A44"/>
+                </a:solidFill>
+                <a:latin typeface="Nunito Sans"/>
+              </a:rPr>
+              <a:t>Una chica: «Esta app de noticias dice la verdad». Un chico: «¿Cómo lo sabes?». La chica: «Porque en la propia app pone que todas sus noticias son verdad».</a:t>
+            </a:r>
+          </a:p>
+        </p:txBody>
+      </p:sp>
+      <p:sp>
+        <p:nvSpPr>
+          <p:cNvPr id="6" name="TextBox 5"/>
+          <p:cNvSpPr txBox="1"/>
+          <p:nvPr/>
+        </p:nvSpPr>
+        <p:spPr>
+          <a:xfrm>
+            <a:off x="640000" y="2900000"/>
+            <a:ext cx="10912000" cy="3500000"/>
           </a:xfrm>
           <a:prstGeom prst="rect">
             <a:avLst/>
@@ -4419,101 +4448,101 @@
           <a:p>
             <a:pPr>
               <a:spcAft>
-                <a:spcPts val="1260"/>
-              </a:spcAft>
-            </a:pPr>
-            <a:r>
-              <a:rPr sz="2800" b="1">
+                <a:spcPts val="1080"/>
+              </a:spcAft>
+            </a:pPr>
+            <a:r>
+              <a:rPr sz="2400" b="1">
                 <a:solidFill>
                   <a:srgbClr val="E8793A"/>
                 </a:solidFill>
                 <a:latin typeface="Nunito Sans"/>
               </a:rPr>
-              <a:t>• </a:t>
-            </a:r>
-            <a:r>
-              <a:rPr sz="2800" b="0">
+              <a:t>1. </a:t>
+            </a:r>
+            <a:r>
+              <a:rPr sz="2400" b="0">
                 <a:solidFill>
                   <a:srgbClr val="1F2A44"/>
                 </a:solidFill>
                 <a:latin typeface="Nunito Sans"/>
               </a:rPr>
-              <a:t>Milgram hizo muchas versiones: en unas obedeció casi nadie, en otras casi todos</a:t>
-            </a:r>
-          </a:p>
-          <a:p>
-            <a:pPr>
-              <a:spcAft>
-                <a:spcPts val="1260"/>
-              </a:spcAft>
-            </a:pPr>
-            <a:r>
-              <a:rPr sz="2800" b="1">
+              <a:t>¿Cuál es la conclusión? La app dice la verdad.</a:t>
+            </a:r>
+          </a:p>
+          <a:p>
+            <a:pPr>
+              <a:spcAft>
+                <a:spcPts val="1080"/>
+              </a:spcAft>
+            </a:pPr>
+            <a:r>
+              <a:rPr sz="2400" b="1">
                 <a:solidFill>
                   <a:srgbClr val="E8793A"/>
                 </a:solidFill>
                 <a:latin typeface="Nunito Sans"/>
               </a:rPr>
-              <a:t>• </a:t>
-            </a:r>
-            <a:r>
-              <a:rPr sz="2800" b="0">
+              <a:t>2. </a:t>
+            </a:r>
+            <a:r>
+              <a:rPr sz="2400" b="0">
                 <a:solidFill>
                   <a:srgbClr val="1F2A44"/>
                 </a:solidFill>
                 <a:latin typeface="Nunito Sans"/>
               </a:rPr>
-              <a:t>Algunos voluntarios dudaban de que las descargas fueran reales</a:t>
-            </a:r>
-          </a:p>
-          <a:p>
-            <a:pPr>
-              <a:spcAft>
-                <a:spcPts val="1260"/>
-              </a:spcAft>
-            </a:pPr>
-            <a:r>
-              <a:rPr sz="2800" b="1">
+              <a:t>¿Cuál es la razón? Lo que dice la propia app.</a:t>
+            </a:r>
+          </a:p>
+          <a:p>
+            <a:pPr>
+              <a:spcAft>
+                <a:spcPts val="1080"/>
+              </a:spcAft>
+            </a:pPr>
+            <a:r>
+              <a:rPr sz="2400" b="1">
                 <a:solidFill>
                   <a:srgbClr val="E8793A"/>
                 </a:solidFill>
                 <a:latin typeface="Nunito Sans"/>
               </a:rPr>
-              <a:t>• </a:t>
-            </a:r>
-            <a:r>
-              <a:rPr sz="2800" b="0">
+              <a:t>3. </a:t>
+            </a:r>
+            <a:r>
+              <a:rPr sz="2400" b="0">
                 <a:solidFill>
                   <a:srgbClr val="1F2A44"/>
                 </a:solidFill>
                 <a:latin typeface="Nunito Sans"/>
               </a:rPr>
-              <a:t>Cuando el científico decía «No tiene otra opción», muchos se negaban</a:t>
-            </a:r>
-          </a:p>
-          <a:p>
-            <a:pPr>
-              <a:spcAft>
-                <a:spcPts val="1260"/>
-              </a:spcAft>
-            </a:pPr>
-            <a:r>
-              <a:rPr sz="2800" b="1">
+              <a:t>Para creer esa razón, ya tengo que creer que la app dice la verdad: es un círculo.</a:t>
+            </a:r>
+          </a:p>
+          <a:p>
+            <a:pPr>
+              <a:spcAft>
+                <a:spcPts val="1080"/>
+              </a:spcAft>
+            </a:pPr>
+            <a:r>
+              <a:rPr sz="2400" b="1">
                 <a:solidFill>
                   <a:srgbClr val="E8793A"/>
                 </a:solidFill>
                 <a:latin typeface="Nunito Sans"/>
               </a:rPr>
-              <a:t>• </a:t>
-            </a:r>
-            <a:r>
-              <a:rPr sz="2800" b="0">
+              <a:t>4. </a:t>
+            </a:r>
+            <a:r>
+              <a:rPr sz="2400" b="0">
                 <a:solidFill>
                   <a:srgbClr val="1F2A44"/>
                 </a:solidFill>
                 <a:latin typeface="Nunito Sans"/>
               </a:rPr>
-              <a:t>Quizá muchos no obedecían a ciegas: creían que ayudaban a la ciencia</a:t>
+              <a:t>Conclusión: razonamiento circular. Hace falta una razón de fuera: otras fuentes.</a:t>
             </a:r>
           </a:p>
         </p:txBody>
@@ -4527,6 +4556,340 @@
 </file>
 
 <file path=ppt/slides/slide13.xml><?xml version="1.0" encoding="utf-8"?>
+<p:sld xmlns:a="http://schemas.openxmlformats.org/drawingml/2006/main" xmlns:p="http://schemas.openxmlformats.org/presentationml/2006/main" xmlns:r="http://schemas.openxmlformats.org/officeDocument/2006/relationships">
+  <p:cSld>
+    <p:bg>
+      <p:bgPr>
+        <a:solidFill>
+          <a:srgbClr val="F6C9A8"/>
+        </a:solidFill>
+        <a:effectLst/>
+      </p:bgPr>
+    </p:bg>
+    <p:spTree>
+      <p:nvGrpSpPr>
+        <p:cNvPr id="1" name=""/>
+        <p:cNvGrpSpPr/>
+        <p:nvPr/>
+      </p:nvGrpSpPr>
+      <p:grpSpPr/>
+      <p:sp>
+        <p:nvSpPr>
+          <p:cNvPr id="2" name="TextBox 1"/>
+          <p:cNvSpPr txBox="1"/>
+          <p:nvPr/>
+        </p:nvSpPr>
+        <p:spPr>
+          <a:xfrm>
+            <a:off x="640000" y="380000"/>
+            <a:ext cx="10912000" cy="420000"/>
+          </a:xfrm>
+          <a:prstGeom prst="rect">
+            <a:avLst/>
+          </a:prstGeom>
+          <a:noFill/>
+        </p:spPr>
+        <p:txBody>
+          <a:bodyPr wrap="square">
+            <a:spAutoFit/>
+          </a:bodyPr>
+          <a:lstStyle/>
+          <a:p>
+            <a:pPr>
+              <a:spcAft>
+                <a:spcPts val="630"/>
+              </a:spcAft>
+            </a:pPr>
+            <a:r>
+              <a:rPr sz="1400" b="1">
+                <a:solidFill>
+                  <a:srgbClr val="1F2A44"/>
+                </a:solidFill>
+                <a:latin typeface="Nunito Sans"/>
+              </a:rPr>
+              <a:t>CASO TRAMPA · BLOQUE 2 · CASOS RESUELTOS</a:t>
+            </a:r>
+          </a:p>
+        </p:txBody>
+      </p:sp>
+      <p:sp>
+        <p:nvSpPr>
+          <p:cNvPr id="3" name="TextBox 2"/>
+          <p:cNvSpPr txBox="1"/>
+          <p:nvPr/>
+        </p:nvSpPr>
+        <p:spPr>
+          <a:xfrm>
+            <a:off x="640000" y="760000"/>
+            <a:ext cx="10912000" cy="800000"/>
+          </a:xfrm>
+          <a:prstGeom prst="rect">
+            <a:avLst/>
+          </a:prstGeom>
+          <a:noFill/>
+        </p:spPr>
+        <p:txBody>
+          <a:bodyPr wrap="square">
+            <a:spAutoFit/>
+          </a:bodyPr>
+          <a:lstStyle/>
+          <a:p>
+            <a:pPr>
+              <a:spcAft>
+                <a:spcPts val="1710"/>
+              </a:spcAft>
+            </a:pPr>
+            <a:r>
+              <a:rPr sz="3800" b="1">
+                <a:solidFill>
+                  <a:srgbClr val="1F2A44"/>
+                </a:solidFill>
+                <a:latin typeface="Fredoka"/>
+              </a:rPr>
+              <a:t>⚠ Sin pruebas, sin castigo</a:t>
+            </a:r>
+          </a:p>
+        </p:txBody>
+      </p:sp>
+      <p:sp>
+        <p:nvSpPr>
+          <p:cNvPr id="4" name="Rectangle 3"/>
+          <p:cNvSpPr/>
+          <p:nvPr/>
+        </p:nvSpPr>
+        <p:spPr>
+          <a:xfrm>
+            <a:off x="640000" y="1600000"/>
+            <a:ext cx="10912000" cy="1100000"/>
+          </a:xfrm>
+          <a:prstGeom prst="rect">
+            <a:avLst/>
+          </a:prstGeom>
+          <a:solidFill>
+            <a:srgbClr val="FBF7EF"/>
+          </a:solidFill>
+          <a:ln>
+            <a:noFill/>
+          </a:ln>
+        </p:spPr>
+        <p:style>
+          <a:lnRef idx="1">
+            <a:schemeClr val="accent1"/>
+          </a:lnRef>
+          <a:fillRef idx="3">
+            <a:schemeClr val="accent1"/>
+          </a:fillRef>
+          <a:effectRef idx="2">
+            <a:schemeClr val="accent1"/>
+          </a:effectRef>
+          <a:fontRef idx="minor">
+            <a:schemeClr val="lt1"/>
+          </a:fontRef>
+        </p:style>
+        <p:txBody>
+          <a:bodyPr rtlCol="0" anchor="ctr"/>
+          <a:lstStyle/>
+          <a:p>
+            <a:pPr algn="ctr"/>
+          </a:p>
+        </p:txBody>
+      </p:sp>
+      <p:sp>
+        <p:nvSpPr>
+          <p:cNvPr id="5" name="TextBox 4"/>
+          <p:cNvSpPr txBox="1"/>
+          <p:nvPr/>
+        </p:nvSpPr>
+        <p:spPr>
+          <a:xfrm>
+            <a:off x="840000" y="1650000"/>
+            <a:ext cx="10512000" cy="1000000"/>
+          </a:xfrm>
+          <a:prstGeom prst="rect">
+            <a:avLst/>
+          </a:prstGeom>
+          <a:noFill/>
+        </p:spPr>
+        <p:txBody>
+          <a:bodyPr wrap="square" anchor="ctr">
+            <a:spAutoFit/>
+          </a:bodyPr>
+          <a:lstStyle/>
+          <a:p>
+            <a:pPr>
+              <a:spcAft>
+                <a:spcPts val="1170"/>
+              </a:spcAft>
+            </a:pPr>
+            <a:r>
+              <a:rPr sz="2600" b="1">
+                <a:solidFill>
+                  <a:srgbClr val="1F2A44"/>
+                </a:solidFill>
+                <a:latin typeface="Nunito Sans"/>
+              </a:rPr>
+              <a:t>La jefa de estudios: «No hay pruebas de que un alumno copiara en el examen. Así que no se le castiga».</a:t>
+            </a:r>
+          </a:p>
+        </p:txBody>
+      </p:sp>
+      <p:sp>
+        <p:nvSpPr>
+          <p:cNvPr id="6" name="TextBox 5"/>
+          <p:cNvSpPr txBox="1"/>
+          <p:nvPr/>
+        </p:nvSpPr>
+        <p:spPr>
+          <a:xfrm>
+            <a:off x="640000" y="2900000"/>
+            <a:ext cx="10912000" cy="3500000"/>
+          </a:xfrm>
+          <a:prstGeom prst="rect">
+            <a:avLst/>
+          </a:prstGeom>
+          <a:noFill/>
+        </p:spPr>
+        <p:txBody>
+          <a:bodyPr wrap="square">
+            <a:spAutoFit/>
+          </a:bodyPr>
+          <a:lstStyle/>
+          <a:p>
+            <a:pPr>
+              <a:spcAft>
+                <a:spcPts val="1080"/>
+              </a:spcAft>
+            </a:pPr>
+            <a:r>
+              <a:rPr sz="2400" b="1">
+                <a:solidFill>
+                  <a:srgbClr val="E8793A"/>
+                </a:solidFill>
+                <a:latin typeface="Nunito Sans"/>
+              </a:rPr>
+              <a:t>1. </a:t>
+            </a:r>
+            <a:r>
+              <a:rPr sz="2400" b="0">
+                <a:solidFill>
+                  <a:srgbClr val="1F2A44"/>
+                </a:solidFill>
+                <a:latin typeface="Nunito Sans"/>
+              </a:rPr>
+              <a:t>Decide algo porque no hay pruebas… ¿apelación a la ignorancia?</a:t>
+            </a:r>
+          </a:p>
+          <a:p>
+            <a:pPr>
+              <a:spcAft>
+                <a:spcPts val="1080"/>
+              </a:spcAft>
+            </a:pPr>
+            <a:r>
+              <a:rPr sz="2400" b="1">
+                <a:solidFill>
+                  <a:srgbClr val="E8793A"/>
+                </a:solidFill>
+                <a:latin typeface="Nunito Sans"/>
+              </a:rPr>
+              <a:t>2. </a:t>
+            </a:r>
+            <a:r>
+              <a:rPr sz="2400" b="0">
+                <a:solidFill>
+                  <a:srgbClr val="1F2A44"/>
+                </a:solidFill>
+                <a:latin typeface="Nunito Sans"/>
+              </a:rPr>
+              <a:t>Parece la misma forma: «no se ha demostrado que sí, luego no».</a:t>
+            </a:r>
+          </a:p>
+          <a:p>
+            <a:pPr>
+              <a:spcAft>
+                <a:spcPts val="1080"/>
+              </a:spcAft>
+            </a:pPr>
+            <a:r>
+              <a:rPr sz="2400" b="1">
+                <a:solidFill>
+                  <a:srgbClr val="E8793A"/>
+                </a:solidFill>
+                <a:latin typeface="Nunito Sans"/>
+              </a:rPr>
+              <a:t>3. </a:t>
+            </a:r>
+            <a:r>
+              <a:rPr sz="2400" b="0">
+                <a:solidFill>
+                  <a:srgbClr val="1F2A44"/>
+                </a:solidFill>
+                <a:latin typeface="Nunito Sans"/>
+              </a:rPr>
+              <a:t>Pero no dice «seguro que no copió». Decide qué hacer mientras no hay pruebas.</a:t>
+            </a:r>
+          </a:p>
+          <a:p>
+            <a:pPr>
+              <a:spcAft>
+                <a:spcPts val="1080"/>
+              </a:spcAft>
+            </a:pPr>
+            <a:r>
+              <a:rPr sz="2400" b="1">
+                <a:solidFill>
+                  <a:srgbClr val="E8793A"/>
+                </a:solidFill>
+                <a:latin typeface="Nunito Sans"/>
+              </a:rPr>
+              <a:t>4. </a:t>
+            </a:r>
+            <a:r>
+              <a:rPr sz="2400" b="0">
+                <a:solidFill>
+                  <a:srgbClr val="1F2A44"/>
+                </a:solidFill>
+                <a:latin typeface="Nunito Sans"/>
+              </a:rPr>
+              <a:t>Es una regla justa: sin pruebas, no se castiga a nadie. Se llama presunción de inocencia.</a:t>
+            </a:r>
+          </a:p>
+          <a:p>
+            <a:pPr>
+              <a:spcAft>
+                <a:spcPts val="1080"/>
+              </a:spcAft>
+            </a:pPr>
+            <a:r>
+              <a:rPr sz="2400" b="1">
+                <a:solidFill>
+                  <a:srgbClr val="E8793A"/>
+                </a:solidFill>
+                <a:latin typeface="Nunito Sans"/>
+              </a:rPr>
+              <a:t>5. </a:t>
+            </a:r>
+            <a:r>
+              <a:rPr sz="2400" b="0">
+                <a:solidFill>
+                  <a:srgbClr val="1F2A44"/>
+                </a:solidFill>
+                <a:latin typeface="Nunito Sans"/>
+              </a:rPr>
+              <a:t>Conclusión: no es falacia. Decidir cómo actuar sin pruebas no es afirmar que algo es verdad.</a:t>
+            </a:r>
+          </a:p>
+        </p:txBody>
+      </p:sp>
+    </p:spTree>
+  </p:cSld>
+  <p:clrMapOvr>
+    <a:masterClrMapping/>
+  </p:clrMapOvr>
+</p:sld>
+</file>
+
+<file path=ppt/slides/slide14.xml><?xml version="1.0" encoding="utf-8"?>
 <p:sld xmlns:a="http://schemas.openxmlformats.org/drawingml/2006/main" xmlns:p="http://schemas.openxmlformats.org/presentationml/2006/main" xmlns:r="http://schemas.openxmlformats.org/officeDocument/2006/relationships">
   <p:cSld>
     <p:bg>
@@ -4617,7 +4980,7 @@
                 </a:solidFill>
                 <a:latin typeface="Fredoka"/>
               </a:rPr>
-              <a:t>Qué aprendemos</a:t>
+              <a:t>¿Cuándo no es falacia?</a:t>
             </a:r>
           </a:p>
         </p:txBody>
@@ -4630,7 +4993,7 @@
 </p:sld>
 </file>
 
-<file path=ppt/slides/slide14.xml><?xml version="1.0" encoding="utf-8"?>
+<file path=ppt/slides/slide15.xml><?xml version="1.0" encoding="utf-8"?>
 <p:sld xmlns:a="http://schemas.openxmlformats.org/drawingml/2006/main" xmlns:p="http://schemas.openxmlformats.org/presentationml/2006/main" xmlns:r="http://schemas.openxmlformats.org/officeDocument/2006/relationships">
   <p:cSld>
     <p:bg>
@@ -4682,7 +5045,7 @@
                 </a:solidFill>
                 <a:latin typeface="Nunito Sans"/>
               </a:rPr>
-              <a:t>BLOQUE 3 · QUÉ APRENDEMOS</a:t>
+              <a:t>BLOQUE 3 · ¿CUÁNDO NO ES FALACIA?</a:t>
             </a:r>
           </a:p>
         </p:txBody>
@@ -4721,478 +5084,7 @@
                 </a:solidFill>
                 <a:latin typeface="Fredoka"/>
               </a:rPr>
-              <a:t>Asch y Milgram</a:t>
-            </a:r>
-          </a:p>
-        </p:txBody>
-      </p:sp>
-      <p:graphicFrame>
-        <p:nvGraphicFramePr>
-          <p:cNvPr id="4" name="Table 3"/>
-          <p:cNvGraphicFramePr>
-            <a:graphicFrameLocks noGrp="1"/>
-          </p:cNvGraphicFramePr>
-          <p:nvPr/>
-        </p:nvGraphicFramePr>
-        <p:xfrm>
-          <a:off x="640000" y="1700000"/>
-          <a:ext cx="10912000" cy="3000000"/>
-        </p:xfrm>
-        <a:graphic>
-          <a:graphicData uri="http://schemas.openxmlformats.org/drawingml/2006/table">
-            <a:tbl>
-              <a:tblPr firstRow="1" bandRow="1">
-                <a:tableStyleId>{5C22544A-7EE6-4342-B048-85BDC9FD1C3A}</a:tableStyleId>
-              </a:tblPr>
-              <a:tblGrid>
-                <a:gridCol w="3637333"/>
-                <a:gridCol w="3637333"/>
-                <a:gridCol w="3637334"/>
-              </a:tblGrid>
-              <a:tr h="600000">
-                <a:tc>
-                  <a:txBody>
-                    <a:bodyPr/>
-                    <a:lstStyle/>
-                    <a:p>
-                      <a:r>
-                        <a:rPr sz="2000" b="1">
-                          <a:solidFill>
-                            <a:srgbClr val="FBF7EF"/>
-                          </a:solidFill>
-                          <a:latin typeface="Fredoka"/>
-                        </a:rPr>
-                        <a:t/>
-                      </a:r>
-                    </a:p>
-                  </a:txBody>
-                  <a:tcPr>
-                    <a:solidFill>
-                      <a:srgbClr val="1F2A44"/>
-                    </a:solidFill>
-                  </a:tcPr>
-                </a:tc>
-                <a:tc>
-                  <a:txBody>
-                    <a:bodyPr/>
-                    <a:lstStyle/>
-                    <a:p>
-                      <a:r>
-                        <a:rPr sz="2000" b="1">
-                          <a:solidFill>
-                            <a:srgbClr val="FBF7EF"/>
-                          </a:solidFill>
-                          <a:latin typeface="Fredoka"/>
-                        </a:rPr>
-                        <a:t>Asch</a:t>
-                      </a:r>
-                    </a:p>
-                  </a:txBody>
-                  <a:tcPr>
-                    <a:solidFill>
-                      <a:srgbClr val="1F2A44"/>
-                    </a:solidFill>
-                  </a:tcPr>
-                </a:tc>
-                <a:tc>
-                  <a:txBody>
-                    <a:bodyPr/>
-                    <a:lstStyle/>
-                    <a:p>
-                      <a:r>
-                        <a:rPr sz="2000" b="1">
-                          <a:solidFill>
-                            <a:srgbClr val="FBF7EF"/>
-                          </a:solidFill>
-                          <a:latin typeface="Fredoka"/>
-                        </a:rPr>
-                        <a:t>Milgram</a:t>
-                      </a:r>
-                    </a:p>
-                  </a:txBody>
-                  <a:tcPr>
-                    <a:solidFill>
-                      <a:srgbClr val="1F2A44"/>
-                    </a:solidFill>
-                  </a:tcPr>
-                </a:tc>
-              </a:tr>
-              <a:tr h="600000">
-                <a:tc>
-                  <a:txBody>
-                    <a:bodyPr/>
-                    <a:lstStyle/>
-                    <a:p>
-                      <a:r>
-                        <a:rPr sz="2000" b="1">
-                          <a:solidFill>
-                            <a:srgbClr val="1F2A44"/>
-                          </a:solidFill>
-                          <a:latin typeface="Nunito Sans"/>
-                        </a:rPr>
-                        <a:t>Qué estudia</a:t>
-                      </a:r>
-                    </a:p>
-                  </a:txBody>
-                  <a:tcPr>
-                    <a:solidFill>
-                      <a:srgbClr val="FFFFFF"/>
-                    </a:solidFill>
-                  </a:tcPr>
-                </a:tc>
-                <a:tc>
-                  <a:txBody>
-                    <a:bodyPr/>
-                    <a:lstStyle/>
-                    <a:p>
-                      <a:r>
-                        <a:rPr sz="2000" b="0">
-                          <a:solidFill>
-                            <a:srgbClr val="1F2A44"/>
-                          </a:solidFill>
-                          <a:latin typeface="Nunito Sans"/>
-                        </a:rPr>
-                        <a:t>Conformidad: seguir al grupo</a:t>
-                      </a:r>
-                    </a:p>
-                  </a:txBody>
-                  <a:tcPr>
-                    <a:solidFill>
-                      <a:srgbClr val="FFFFFF"/>
-                    </a:solidFill>
-                  </a:tcPr>
-                </a:tc>
-                <a:tc>
-                  <a:txBody>
-                    <a:bodyPr/>
-                    <a:lstStyle/>
-                    <a:p>
-                      <a:r>
-                        <a:rPr sz="2000" b="0">
-                          <a:solidFill>
-                            <a:srgbClr val="1F2A44"/>
-                          </a:solidFill>
-                          <a:latin typeface="Nunito Sans"/>
-                        </a:rPr>
-                        <a:t>Obediencia: seguir a una autoridad</a:t>
-                      </a:r>
-                    </a:p>
-                  </a:txBody>
-                  <a:tcPr>
-                    <a:solidFill>
-                      <a:srgbClr val="FFFFFF"/>
-                    </a:solidFill>
-                  </a:tcPr>
-                </a:tc>
-              </a:tr>
-              <a:tr h="600000">
-                <a:tc>
-                  <a:txBody>
-                    <a:bodyPr/>
-                    <a:lstStyle/>
-                    <a:p>
-                      <a:r>
-                        <a:rPr sz="2000" b="1">
-                          <a:solidFill>
-                            <a:srgbClr val="1F2A44"/>
-                          </a:solidFill>
-                          <a:latin typeface="Nunito Sans"/>
-                        </a:rPr>
-                        <a:t>Quién presiona</a:t>
-                      </a:r>
-                    </a:p>
-                  </a:txBody>
-                  <a:tcPr>
-                    <a:solidFill>
-                      <a:srgbClr val="EAF0F7"/>
-                    </a:solidFill>
-                  </a:tcPr>
-                </a:tc>
-                <a:tc>
-                  <a:txBody>
-                    <a:bodyPr/>
-                    <a:lstStyle/>
-                    <a:p>
-                      <a:r>
-                        <a:rPr sz="2000" b="0">
-                          <a:solidFill>
-                            <a:srgbClr val="1F2A44"/>
-                          </a:solidFill>
-                          <a:latin typeface="Nunito Sans"/>
-                        </a:rPr>
-                        <a:t>Un grupo de iguales</a:t>
-                      </a:r>
-                    </a:p>
-                  </a:txBody>
-                  <a:tcPr>
-                    <a:solidFill>
-                      <a:srgbClr val="EAF0F7"/>
-                    </a:solidFill>
-                  </a:tcPr>
-                </a:tc>
-                <a:tc>
-                  <a:txBody>
-                    <a:bodyPr/>
-                    <a:lstStyle/>
-                    <a:p>
-                      <a:r>
-                        <a:rPr sz="2000" b="0">
-                          <a:solidFill>
-                            <a:srgbClr val="1F2A44"/>
-                          </a:solidFill>
-                          <a:latin typeface="Nunito Sans"/>
-                        </a:rPr>
-                        <a:t>Un científico con bata</a:t>
-                      </a:r>
-                    </a:p>
-                  </a:txBody>
-                  <a:tcPr>
-                    <a:solidFill>
-                      <a:srgbClr val="EAF0F7"/>
-                    </a:solidFill>
-                  </a:tcPr>
-                </a:tc>
-              </a:tr>
-              <a:tr h="600000">
-                <a:tc>
-                  <a:txBody>
-                    <a:bodyPr/>
-                    <a:lstStyle/>
-                    <a:p>
-                      <a:r>
-                        <a:rPr sz="2000" b="1">
-                          <a:solidFill>
-                            <a:srgbClr val="1F2A44"/>
-                          </a:solidFill>
-                          <a:latin typeface="Nunito Sans"/>
-                        </a:rPr>
-                        <a:t>Qué pasó</a:t>
-                      </a:r>
-                    </a:p>
-                  </a:txBody>
-                  <a:tcPr>
-                    <a:solidFill>
-                      <a:srgbClr val="FFFFFF"/>
-                    </a:solidFill>
-                  </a:tcPr>
-                </a:tc>
-                <a:tc>
-                  <a:txBody>
-                    <a:bodyPr/>
-                    <a:lstStyle/>
-                    <a:p>
-                      <a:r>
-                        <a:rPr sz="2000" b="0">
-                          <a:solidFill>
-                            <a:srgbClr val="1F2A44"/>
-                          </a:solidFill>
-                          <a:latin typeface="Nunito Sans"/>
-                        </a:rPr>
-                        <a:t>3 de cada 4 cedieron alguna vez; 1 de cada 4, nunca</a:t>
-                      </a:r>
-                    </a:p>
-                  </a:txBody>
-                  <a:tcPr>
-                    <a:solidFill>
-                      <a:srgbClr val="FFFFFF"/>
-                    </a:solidFill>
-                  </a:tcPr>
-                </a:tc>
-                <a:tc>
-                  <a:txBody>
-                    <a:bodyPr/>
-                    <a:lstStyle/>
-                    <a:p>
-                      <a:r>
-                        <a:rPr sz="2000" b="0">
-                          <a:solidFill>
-                            <a:srgbClr val="1F2A44"/>
-                          </a:solidFill>
-                          <a:latin typeface="Nunito Sans"/>
-                        </a:rPr>
-                        <a:t>El 65 % llegó al final en la versión más conocida</a:t>
-                      </a:r>
-                    </a:p>
-                  </a:txBody>
-                  <a:tcPr>
-                    <a:solidFill>
-                      <a:srgbClr val="FFFFFF"/>
-                    </a:solidFill>
-                  </a:tcPr>
-                </a:tc>
-              </a:tr>
-              <a:tr h="600000">
-                <a:tc>
-                  <a:txBody>
-                    <a:bodyPr/>
-                    <a:lstStyle/>
-                    <a:p>
-                      <a:r>
-                        <a:rPr sz="2000" b="1">
-                          <a:solidFill>
-                            <a:srgbClr val="1F2A44"/>
-                          </a:solidFill>
-                          <a:latin typeface="Nunito Sans"/>
-                        </a:rPr>
-                        <a:t>Qué ayudó a resistir</a:t>
-                      </a:r>
-                    </a:p>
-                  </a:txBody>
-                  <a:tcPr>
-                    <a:solidFill>
-                      <a:srgbClr val="EAF0F7"/>
-                    </a:solidFill>
-                  </a:tcPr>
-                </a:tc>
-                <a:tc>
-                  <a:txBody>
-                    <a:bodyPr/>
-                    <a:lstStyle/>
-                    <a:p>
-                      <a:r>
-                        <a:rPr sz="2000" b="0">
-                          <a:solidFill>
-                            <a:srgbClr val="1F2A44"/>
-                          </a:solidFill>
-                          <a:latin typeface="Nunito Sans"/>
-                        </a:rPr>
-                        <a:t>Tener un aliado</a:t>
-                      </a:r>
-                    </a:p>
-                  </a:txBody>
-                  <a:tcPr>
-                    <a:solidFill>
-                      <a:srgbClr val="EAF0F7"/>
-                    </a:solidFill>
-                  </a:tcPr>
-                </a:tc>
-                <a:tc>
-                  <a:txBody>
-                    <a:bodyPr/>
-                    <a:lstStyle/>
-                    <a:p>
-                      <a:r>
-                        <a:rPr sz="2000" b="0">
-                          <a:solidFill>
-                            <a:srgbClr val="1F2A44"/>
-                          </a:solidFill>
-                          <a:latin typeface="Nunito Sans"/>
-                        </a:rPr>
-                        <a:t>Ver a otros negarse; la autoridad lejos</a:t>
-                      </a:r>
-                    </a:p>
-                  </a:txBody>
-                  <a:tcPr>
-                    <a:solidFill>
-                      <a:srgbClr val="EAF0F7"/>
-                    </a:solidFill>
-                  </a:tcPr>
-                </a:tc>
-              </a:tr>
-            </a:tbl>
-          </a:graphicData>
-        </a:graphic>
-      </p:graphicFrame>
-    </p:spTree>
-  </p:cSld>
-  <p:clrMapOvr>
-    <a:masterClrMapping/>
-  </p:clrMapOvr>
-</p:sld>
-</file>
-
-<file path=ppt/slides/slide15.xml><?xml version="1.0" encoding="utf-8"?>
-<p:sld xmlns:a="http://schemas.openxmlformats.org/drawingml/2006/main" xmlns:p="http://schemas.openxmlformats.org/presentationml/2006/main" xmlns:r="http://schemas.openxmlformats.org/officeDocument/2006/relationships">
-  <p:cSld>
-    <p:bg>
-      <p:bgPr>
-        <a:solidFill>
-          <a:srgbClr val="F6C9A8"/>
-        </a:solidFill>
-        <a:effectLst/>
-      </p:bgPr>
-    </p:bg>
-    <p:spTree>
-      <p:nvGrpSpPr>
-        <p:cNvPr id="1" name=""/>
-        <p:cNvGrpSpPr/>
-        <p:nvPr/>
-      </p:nvGrpSpPr>
-      <p:grpSpPr/>
-      <p:sp>
-        <p:nvSpPr>
-          <p:cNvPr id="2" name="TextBox 1"/>
-          <p:cNvSpPr txBox="1"/>
-          <p:nvPr/>
-        </p:nvSpPr>
-        <p:spPr>
-          <a:xfrm>
-            <a:off x="640000" y="380000"/>
-            <a:ext cx="10912000" cy="420000"/>
-          </a:xfrm>
-          <a:prstGeom prst="rect">
-            <a:avLst/>
-          </a:prstGeom>
-          <a:noFill/>
-        </p:spPr>
-        <p:txBody>
-          <a:bodyPr wrap="square">
-            <a:spAutoFit/>
-          </a:bodyPr>
-          <a:lstStyle/>
-          <a:p>
-            <a:pPr>
-              <a:spcAft>
-                <a:spcPts val="630"/>
-              </a:spcAft>
-            </a:pPr>
-            <a:r>
-              <a:rPr sz="1400" b="1">
-                <a:solidFill>
-                  <a:srgbClr val="1F2A44"/>
-                </a:solidFill>
-                <a:latin typeface="Nunito Sans"/>
-              </a:rPr>
-              <a:t>CASO TRAMPA · BLOQUE 3 · QUÉ APRENDEMOS</a:t>
-            </a:r>
-          </a:p>
-        </p:txBody>
-      </p:sp>
-      <p:sp>
-        <p:nvSpPr>
-          <p:cNvPr id="3" name="TextBox 2"/>
-          <p:cNvSpPr txBox="1"/>
-          <p:nvPr/>
-        </p:nvSpPr>
-        <p:spPr>
-          <a:xfrm>
-            <a:off x="640000" y="760000"/>
-            <a:ext cx="10912000" cy="800000"/>
-          </a:xfrm>
-          <a:prstGeom prst="rect">
-            <a:avLst/>
-          </a:prstGeom>
-          <a:noFill/>
-        </p:spPr>
-        <p:txBody>
-          <a:bodyPr wrap="square">
-            <a:spAutoFit/>
-          </a:bodyPr>
-          <a:lstStyle/>
-          <a:p>
-            <a:pPr>
-              <a:spcAft>
-                <a:spcPts val="1710"/>
-              </a:spcAft>
-            </a:pPr>
-            <a:r>
-              <a:rPr sz="3800" b="1">
-                <a:solidFill>
-                  <a:srgbClr val="1F2A44"/>
-                </a:solidFill>
-                <a:latin typeface="Fredoka"/>
-              </a:rPr>
-              <a:t>⚠ El simulacro de incendio</a:t>
+              <a:t>Falta de pruebas: ¿truco o prudencia?</a:t>
             </a:r>
           </a:p>
         </p:txBody>
@@ -5205,14 +5097,14 @@
         </p:nvSpPr>
         <p:spPr>
           <a:xfrm>
-            <a:off x="640000" y="1600000"/>
-            <a:ext cx="10912000" cy="1100000"/>
+            <a:off x="640000" y="1650000"/>
+            <a:ext cx="5306000" cy="4400000"/>
           </a:xfrm>
           <a:prstGeom prst="rect">
             <a:avLst/>
           </a:prstGeom>
           <a:solidFill>
-            <a:srgbClr val="FBF7EF"/>
+            <a:srgbClr val="FBE3D2"/>
           </a:solidFill>
           <a:ln>
             <a:noFill/>
@@ -5248,8 +5140,8 @@
         </p:nvSpPr>
         <p:spPr>
           <a:xfrm>
-            <a:off x="840000" y="1650000"/>
-            <a:ext cx="10512000" cy="1000000"/>
+            <a:off x="840000" y="1750000"/>
+            <a:ext cx="4906000" cy="600000"/>
           </a:xfrm>
           <a:prstGeom prst="rect">
             <a:avLst/>
@@ -5257,24 +5149,24 @@
           <a:noFill/>
         </p:spPr>
         <p:txBody>
-          <a:bodyPr wrap="square" anchor="ctr">
+          <a:bodyPr wrap="square">
             <a:spAutoFit/>
           </a:bodyPr>
           <a:lstStyle/>
           <a:p>
             <a:pPr>
               <a:spcAft>
-                <a:spcPts val="1170"/>
-              </a:spcAft>
-            </a:pPr>
-            <a:r>
-              <a:rPr sz="2600" b="1">
-                <a:solidFill>
-                  <a:srgbClr val="1F2A44"/>
-                </a:solidFill>
-                <a:latin typeface="Nunito Sans"/>
-              </a:rPr>
-              <a:t>Suena la alarma del simulacro. El profesor dice: «En fila, por la escalera B». Todos salen en fila. Una chica también, sin discutir.</a:t>
+                <a:spcPts val="1260"/>
+              </a:spcAft>
+            </a:pPr>
+            <a:r>
+              <a:rPr sz="2800" b="1">
+                <a:solidFill>
+                  <a:srgbClr val="C2531C"/>
+                </a:solidFill>
+                <a:latin typeface="Nunito Sans"/>
+              </a:rPr>
+              <a:t>Falacia</a:t>
             </a:r>
           </a:p>
         </p:txBody>
@@ -5287,8 +5179,8 @@
         </p:nvSpPr>
         <p:spPr>
           <a:xfrm>
-            <a:off x="640000" y="2900000"/>
-            <a:ext cx="10912000" cy="3500000"/>
+            <a:off x="840000" y="2400000"/>
+            <a:ext cx="4906000" cy="3500000"/>
           </a:xfrm>
           <a:prstGeom prst="rect">
             <a:avLst/>
@@ -5303,126 +5195,231 @@
           <a:p>
             <a:pPr>
               <a:spcAft>
-                <a:spcPts val="1080"/>
-              </a:spcAft>
-            </a:pPr>
-            <a:r>
-              <a:rPr sz="2400" b="1">
+                <a:spcPts val="1170"/>
+              </a:spcAft>
+            </a:pPr>
+            <a:r>
+              <a:rPr sz="2600" b="1">
                 <a:solidFill>
                   <a:srgbClr val="E8793A"/>
                 </a:solidFill>
                 <a:latin typeface="Nunito Sans"/>
               </a:rPr>
-              <a:t>1. </a:t>
-            </a:r>
-            <a:r>
-              <a:rPr sz="2400" b="0">
+              <a:t>• </a:t>
+            </a:r>
+            <a:r>
+              <a:rPr sz="2600" b="0">
                 <a:solidFill>
                   <a:srgbClr val="1F2A44"/>
                 </a:solidFill>
                 <a:latin typeface="Nunito Sans"/>
               </a:rPr>
-              <a:t>Obedece y hace lo mismo que el grupo… ¿como en Asch y Milgram?</a:t>
-            </a:r>
-          </a:p>
-          <a:p>
-            <a:pPr>
-              <a:spcAft>
-                <a:spcPts val="1080"/>
-              </a:spcAft>
-            </a:pPr>
-            <a:r>
-              <a:rPr sz="2400" b="1">
+              <a:t>«No está demostrado que no, así que sí»</a:t>
+            </a:r>
+          </a:p>
+          <a:p>
+            <a:pPr>
+              <a:spcAft>
+                <a:spcPts val="1170"/>
+              </a:spcAft>
+            </a:pPr>
+            <a:r>
+              <a:rPr sz="2600" b="1">
                 <a:solidFill>
                   <a:srgbClr val="E8793A"/>
                 </a:solidFill>
                 <a:latin typeface="Nunito Sans"/>
               </a:rPr>
-              <a:t>2. </a:t>
-            </a:r>
-            <a:r>
-              <a:rPr sz="2400" b="0">
+              <a:t>• </a:t>
+            </a:r>
+            <a:r>
+              <a:rPr sz="2600" b="0">
                 <a:solidFill>
                   <a:srgbClr val="1F2A44"/>
                 </a:solidFill>
                 <a:latin typeface="Nunito Sans"/>
               </a:rPr>
-              <a:t>Sí: obedece a una autoridad y hace lo mismo que los demás.</a:t>
-            </a:r>
-          </a:p>
-          <a:p>
-            <a:pPr>
-              <a:spcAft>
-                <a:spcPts val="1080"/>
-              </a:spcAft>
-            </a:pPr>
-            <a:r>
-              <a:rPr sz="2400" b="1">
+              <a:t>La razón repite la conclusión</a:t>
+            </a:r>
+          </a:p>
+        </p:txBody>
+      </p:sp>
+      <p:sp>
+        <p:nvSpPr>
+          <p:cNvPr id="7" name="Rectangle 6"/>
+          <p:cNvSpPr/>
+          <p:nvPr/>
+        </p:nvSpPr>
+        <p:spPr>
+          <a:xfrm>
+            <a:off x="6246000" y="1650000"/>
+            <a:ext cx="5306000" cy="4400000"/>
+          </a:xfrm>
+          <a:prstGeom prst="rect">
+            <a:avLst/>
+          </a:prstGeom>
+          <a:solidFill>
+            <a:srgbClr val="EAF0F7"/>
+          </a:solidFill>
+          <a:ln>
+            <a:noFill/>
+          </a:ln>
+        </p:spPr>
+        <p:style>
+          <a:lnRef idx="1">
+            <a:schemeClr val="accent1"/>
+          </a:lnRef>
+          <a:fillRef idx="3">
+            <a:schemeClr val="accent1"/>
+          </a:fillRef>
+          <a:effectRef idx="2">
+            <a:schemeClr val="accent1"/>
+          </a:effectRef>
+          <a:fontRef idx="minor">
+            <a:schemeClr val="lt1"/>
+          </a:fontRef>
+        </p:style>
+        <p:txBody>
+          <a:bodyPr rtlCol="0" anchor="ctr"/>
+          <a:lstStyle/>
+          <a:p>
+            <a:pPr algn="ctr"/>
+          </a:p>
+        </p:txBody>
+      </p:sp>
+      <p:sp>
+        <p:nvSpPr>
+          <p:cNvPr id="8" name="TextBox 7"/>
+          <p:cNvSpPr txBox="1"/>
+          <p:nvPr/>
+        </p:nvSpPr>
+        <p:spPr>
+          <a:xfrm>
+            <a:off x="6446000" y="1750000"/>
+            <a:ext cx="4906000" cy="600000"/>
+          </a:xfrm>
+          <a:prstGeom prst="rect">
+            <a:avLst/>
+          </a:prstGeom>
+          <a:noFill/>
+        </p:spPr>
+        <p:txBody>
+          <a:bodyPr wrap="square">
+            <a:spAutoFit/>
+          </a:bodyPr>
+          <a:lstStyle/>
+          <a:p>
+            <a:pPr>
+              <a:spcAft>
+                <a:spcPts val="1260"/>
+              </a:spcAft>
+            </a:pPr>
+            <a:r>
+              <a:rPr sz="2800" b="1">
+                <a:solidFill>
+                  <a:srgbClr val="2F6FB5"/>
+                </a:solidFill>
+                <a:latin typeface="Nunito Sans"/>
+              </a:rPr>
+              <a:t>Legítimo</a:t>
+            </a:r>
+          </a:p>
+        </p:txBody>
+      </p:sp>
+      <p:sp>
+        <p:nvSpPr>
+          <p:cNvPr id="9" name="TextBox 8"/>
+          <p:cNvSpPr txBox="1"/>
+          <p:nvPr/>
+        </p:nvSpPr>
+        <p:spPr>
+          <a:xfrm>
+            <a:off x="6446000" y="2400000"/>
+            <a:ext cx="4906000" cy="3500000"/>
+          </a:xfrm>
+          <a:prstGeom prst="rect">
+            <a:avLst/>
+          </a:prstGeom>
+          <a:noFill/>
+        </p:spPr>
+        <p:txBody>
+          <a:bodyPr wrap="square">
+            <a:spAutoFit/>
+          </a:bodyPr>
+          <a:lstStyle/>
+          <a:p>
+            <a:pPr>
+              <a:spcAft>
+                <a:spcPts val="1170"/>
+              </a:spcAft>
+            </a:pPr>
+            <a:r>
+              <a:rPr sz="2600" b="1">
                 <a:solidFill>
                   <a:srgbClr val="E8793A"/>
                 </a:solidFill>
                 <a:latin typeface="Nunito Sans"/>
               </a:rPr>
-              <a:t>3. </a:t>
-            </a:r>
-            <a:r>
-              <a:rPr sz="2400" b="0">
+              <a:t>• </a:t>
+            </a:r>
+            <a:r>
+              <a:rPr sz="2600" b="0">
                 <a:solidFill>
                   <a:srgbClr val="1F2A44"/>
                 </a:solidFill>
                 <a:latin typeface="Nunito Sans"/>
               </a:rPr>
-              <a:t>Pero la orden es razonable: el profesor conoce el plan de evacuación y no pide hacer daño a nadie.</a:t>
-            </a:r>
-          </a:p>
-          <a:p>
-            <a:pPr>
-              <a:spcAft>
-                <a:spcPts val="1080"/>
-              </a:spcAft>
-            </a:pPr>
-            <a:r>
-              <a:rPr sz="2400" b="1">
+              <a:t>«Hemos buscado bien y no hay pruebas: probablemente no»</a:t>
+            </a:r>
+          </a:p>
+          <a:p>
+            <a:pPr>
+              <a:spcAft>
+                <a:spcPts val="1170"/>
+              </a:spcAft>
+            </a:pPr>
+            <a:r>
+              <a:rPr sz="2600" b="1">
                 <a:solidFill>
                   <a:srgbClr val="E8793A"/>
                 </a:solidFill>
                 <a:latin typeface="Nunito Sans"/>
               </a:rPr>
-              <a:t>4. </a:t>
-            </a:r>
-            <a:r>
-              <a:rPr sz="2400" b="0">
+              <a:t>• </a:t>
+            </a:r>
+            <a:r>
+              <a:rPr sz="2600" b="0">
                 <a:solidFill>
                   <a:srgbClr val="1F2A44"/>
                 </a:solidFill>
                 <a:latin typeface="Nunito Sans"/>
               </a:rPr>
-              <a:t>En una emergencia, discutir cada orden sería peligroso.</a:t>
-            </a:r>
-          </a:p>
-          <a:p>
-            <a:pPr>
-              <a:spcAft>
-                <a:spcPts val="1080"/>
-              </a:spcAft>
-            </a:pPr>
-            <a:r>
-              <a:rPr sz="2400" b="1">
+              <a:t>«Todavía no lo sabemos», sin concluir nada</a:t>
+            </a:r>
+          </a:p>
+          <a:p>
+            <a:pPr>
+              <a:spcAft>
+                <a:spcPts val="1170"/>
+              </a:spcAft>
+            </a:pPr>
+            <a:r>
+              <a:rPr sz="2600" b="1">
                 <a:solidFill>
                   <a:srgbClr val="E8793A"/>
                 </a:solidFill>
                 <a:latin typeface="Nunito Sans"/>
               </a:rPr>
-              <a:t>5. </a:t>
-            </a:r>
-            <a:r>
-              <a:rPr sz="2400" b="0">
+              <a:t>• </a:t>
+            </a:r>
+            <a:r>
+              <a:rPr sz="2600" b="0">
                 <a:solidFill>
                   <a:srgbClr val="1F2A44"/>
                 </a:solidFill>
                 <a:latin typeface="Nunito Sans"/>
               </a:rPr>
-              <a:t>Conclusión: obedecer o seguir al grupo no es malo en sí. Lo malo es hacerlo cuando te piden algo que está mal.</a:t>
+              <a:t>Una razón nueva, que no depende de la conclusión</a:t>
             </a:r>
           </a:p>
         </p:txBody>
@@ -5678,7 +5675,7 @@
                 </a:solidFill>
                 <a:latin typeface="Nunito Sans"/>
               </a:rPr>
-              <a:t>Asch: muchos cedieron alguna vez ante el grupo, aunque la mayoría de respuestas fueron correctas.</a:t>
+              <a:t>Apelación a la ignorancia: «nadie ha demostrado que no, así que es verdad».</a:t>
             </a:r>
           </a:p>
           <a:p>
@@ -5703,7 +5700,7 @@
                 </a:solidFill>
                 <a:latin typeface="Nunito Sans"/>
               </a:rPr>
-              <a:t>Milgram: muchos obedecieron hasta el final, pero cuántos depende mucho de la situación.</a:t>
+              <a:t>Razonamiento circular: la conclusión ya está escondida en la razón.</a:t>
             </a:r>
           </a:p>
           <a:p>
@@ -5728,7 +5725,7 @@
                 </a:solidFill>
                 <a:latin typeface="Nunito Sans"/>
               </a:rPr>
-              <a:t>Un solo aliado ayuda a resistir, y tú puedes ser ese aliado.</a:t>
+              <a:t>Quien afirma algo suele tener que dar pruebas nuevas, no vacíos ni círculos.</a:t>
             </a:r>
           </a:p>
         </p:txBody>
@@ -5832,7 +5829,7 @@
                 </a:solidFill>
                 <a:latin typeface="Fredoka"/>
               </a:rPr>
-              <a:t>El experimento de Asch sobre la conformidad (y, si hay tiempo, el de Milgram)</a:t>
+              <a:t>La falacia ad ignorantiam y el razonamiento circular</a:t>
             </a:r>
           </a:p>
         </p:txBody>
@@ -5871,7 +5868,7 @@
                 </a:solidFill>
                 <a:latin typeface="Nunito Sans"/>
               </a:rPr>
-              <a:t>Ver a personas reales dudando ante el grupo. Revisar antes: algunas imágenes de Milgram pueden impresionar.</a:t>
+              <a:t>Ver ejemplos de «no está demostrado que no» y de argumentos que dan vueltas.</a:t>
             </a:r>
           </a:p>
         </p:txBody>
@@ -6529,7 +6526,7 @@
                 </a:solidFill>
                 <a:latin typeface="Nunito Sans"/>
               </a:rPr>
-              <a:t>Que muchos hagan algo puede ser una ______, pero no una prueba segura.  (sesión 28)</a:t>
+              <a:t>Pregunta que desmonta la causa falsa: ¿podría ser ______ o haber otra causa?  (sesión 28)</a:t>
             </a:r>
           </a:p>
           <a:p>
@@ -6554,7 +6551,7 @@
                 </a:solidFill>
                 <a:latin typeface="Nunito Sans"/>
               </a:rPr>
-              <a:t>La prueba ______ es copiar lo que hacen los demás cuando no sabemos qué hacer.  (sesión 28)</a:t>
+              <a:t>La causa falsa confunde «después de» con «por ______ de».  (sesión 28)</a:t>
             </a:r>
           </a:p>
           <a:p>
@@ -6579,7 +6576,7 @@
                 </a:solidFill>
                 <a:latin typeface="Nunito Sans"/>
               </a:rPr>
-              <a:t>En inglés, la pista falsa se llama red ______.  (sesión 17)</a:t>
+              <a:t>Un ______ es un caso que va en contra de una afirmación general.  (sesión 17)</a:t>
             </a:r>
           </a:p>
         </p:txBody>
@@ -6731,7 +6728,7 @@
                 </a:solidFill>
                 <a:latin typeface="Nunito Sans"/>
               </a:rPr>
-              <a:t>Que muchos hagan algo puede ser una </a:t>
+              <a:t>Pregunta que desmonta la causa falsa: ¿podría ser </a:t>
             </a:r>
             <a:r>
               <a:rPr sz="2600" b="1">
@@ -6740,7 +6737,7 @@
                 </a:solidFill>
                 <a:latin typeface="Nunito Sans"/>
               </a:rPr>
-              <a:t>pista</a:t>
+              <a:t>casualidad</a:t>
             </a:r>
             <a:r>
               <a:rPr sz="2600" b="0">
@@ -6749,7 +6746,7 @@
                 </a:solidFill>
                 <a:latin typeface="Nunito Sans"/>
               </a:rPr>
-              <a:t>, pero no una prueba segura.  (sesión 28)</a:t>
+              <a:t> o haber otra causa?  (sesión 28)</a:t>
             </a:r>
           </a:p>
           <a:p>
@@ -6774,7 +6771,7 @@
                 </a:solidFill>
                 <a:latin typeface="Nunito Sans"/>
               </a:rPr>
-              <a:t>La prueba </a:t>
+              <a:t>La causa falsa confunde «después de» con «por </a:t>
             </a:r>
             <a:r>
               <a:rPr sz="2600" b="1">
@@ -6783,7 +6780,7 @@
                 </a:solidFill>
                 <a:latin typeface="Nunito Sans"/>
               </a:rPr>
-              <a:t>social</a:t>
+              <a:t>culpa</a:t>
             </a:r>
             <a:r>
               <a:rPr sz="2600" b="0">
@@ -6792,7 +6789,7 @@
                 </a:solidFill>
                 <a:latin typeface="Nunito Sans"/>
               </a:rPr>
-              <a:t> es copiar lo que hacen los demás cuando no sabemos qué hacer.  (sesión 28)</a:t>
+              <a:t> de».  (sesión 28)</a:t>
             </a:r>
           </a:p>
           <a:p>
@@ -6817,7 +6814,7 @@
                 </a:solidFill>
                 <a:latin typeface="Nunito Sans"/>
               </a:rPr>
-              <a:t>En inglés, la pista falsa se llama red </a:t>
+              <a:t>Un </a:t>
             </a:r>
             <a:r>
               <a:rPr sz="2600" b="1">
@@ -6826,7 +6823,7 @@
                 </a:solidFill>
                 <a:latin typeface="Nunito Sans"/>
               </a:rPr>
-              <a:t>herring</a:t>
+              <a:t>contraejemplo</a:t>
             </a:r>
             <a:r>
               <a:rPr sz="2600" b="0">
@@ -6835,7 +6832,7 @@
                 </a:solidFill>
                 <a:latin typeface="Nunito Sans"/>
               </a:rPr>
-              <a:t>.  (sesión 17)</a:t>
+              <a:t> es un caso que va en contra de una afirmación general.  (sesión 17)</a:t>
             </a:r>
           </a:p>
         </p:txBody>
@@ -6982,7 +6979,7 @@
                 </a:solidFill>
                 <a:latin typeface="Nunito Sans"/>
               </a:rPr>
-              <a:t>Siete personas dicen en voz alta una respuesta que tú ves clarísimamente que está mal. Ahora te toca a ti.</a:t>
+              <a:t>«Los fantasmas existen: nadie ha demostrado nunca que no existan.»</a:t>
             </a:r>
           </a:p>
         </p:txBody>
@@ -7021,7 +7018,7 @@
                 </a:solidFill>
                 <a:latin typeface="Nunito Sans"/>
               </a:rPr>
-              <a:t>¿Dirías lo que ves o lo mismo que ellos?</a:t>
+              <a:t>¿Que nadie lo haya demostrado es una prueba de que existen?</a:t>
             </a:r>
           </a:p>
         </p:txBody>
@@ -7125,7 +7122,7 @@
                 </a:solidFill>
                 <a:latin typeface="Fredoka"/>
               </a:rPr>
-              <a:t>Asch: seguir al grupo (1951)</a:t>
+              <a:t>Dos falacias sin pruebas</a:t>
             </a:r>
           </a:p>
         </p:txBody>
@@ -7190,7 +7187,7 @@
                 </a:solidFill>
                 <a:latin typeface="Nunito Sans"/>
               </a:rPr>
-              <a:t>BLOQUE 1 · ASCH: SEGUIR AL GRUPO (1951)</a:t>
+              <a:t>BLOQUE 1 · DOS FALACIAS SIN PRUEBAS</a:t>
             </a:r>
           </a:p>
         </p:txBody>
@@ -7229,7 +7226,7 @@
                 </a:solidFill>
                 <a:latin typeface="Fredoka"/>
               </a:rPr>
-              <a:t>Conformidad</a:t>
+              <a:t>Apelación a la ignorancia (ad ignorantiam)</a:t>
             </a:r>
           </a:p>
         </p:txBody>
@@ -7311,7 +7308,7 @@
                 </a:solidFill>
                 <a:latin typeface="Nunito Sans"/>
               </a:rPr>
-              <a:t>La conformidad es cambiar lo que decimos o hacemos para coincidir con el grupo.</a:t>
+              <a:t>Decir que algo es verdad porque nadie ha demostrado que sea falso, o al revés.</a:t>
             </a:r>
           </a:p>
         </p:txBody>
@@ -7353,22 +7350,56 @@
               <a:t>• </a:t>
             </a:r>
             <a:r>
+              <a:rPr sz="2800" b="1">
+                <a:solidFill>
+                  <a:srgbClr val="1F2A44"/>
+                </a:solidFill>
+                <a:latin typeface="Nunito Sans"/>
+              </a:rPr>
+              <a:t>Ignorancia</a:t>
+            </a:r>
+            <a:r>
               <a:rPr sz="2800" b="0">
                 <a:solidFill>
                   <a:srgbClr val="1F2A44"/>
                 </a:solidFill>
                 <a:latin typeface="Nunito Sans"/>
               </a:rPr>
-              <a:t>La estudió el psicólogo </a:t>
-            </a:r>
+              <a:t>: no saber algo</a:t>
+            </a:r>
+          </a:p>
+          <a:p>
+            <a:pPr>
+              <a:spcAft>
+                <a:spcPts val="1260"/>
+              </a:spcAft>
+            </a:pPr>
             <a:r>
               <a:rPr sz="2800" b="1">
                 <a:solidFill>
+                  <a:srgbClr val="E8793A"/>
+                </a:solidFill>
+                <a:latin typeface="Nunito Sans"/>
+              </a:rPr>
+              <a:t>• </a:t>
+            </a:r>
+            <a:r>
+              <a:rPr sz="2800" b="0">
+                <a:solidFill>
                   <a:srgbClr val="1F2A44"/>
                 </a:solidFill>
                 <a:latin typeface="Nunito Sans"/>
               </a:rPr>
-              <a:t>Solomon Asch</a:t>
+              <a:t>No saber que es falso </a:t>
+            </a:r>
+            <a:r>
+              <a:rPr sz="2800" b="1">
+                <a:solidFill>
+                  <a:srgbClr val="1F2A44"/>
+                </a:solidFill>
+                <a:latin typeface="Nunito Sans"/>
+              </a:rPr>
+              <a:t>no</a:t>
             </a:r>
             <a:r>
               <a:rPr sz="2800" b="0">
@@ -7377,7 +7408,7 @@
                 </a:solidFill>
                 <a:latin typeface="Nunito Sans"/>
               </a:rPr>
-              <a:t>, en Estados Unidos</a:t>
+              <a:t> lo hace verdadero</a:t>
             </a:r>
           </a:p>
           <a:p>
@@ -7402,7 +7433,16 @@
                 </a:solidFill>
                 <a:latin typeface="Nunito Sans"/>
               </a:rPr>
-              <a:t>Pasa aunque el grupo esté equivocado</a:t>
+              <a:t>Normalmente, quien afirma algo tiene que dar las </a:t>
+            </a:r>
+            <a:r>
+              <a:rPr sz="2800" b="1">
+                <a:solidFill>
+                  <a:srgbClr val="1F2A44"/>
+                </a:solidFill>
+                <a:latin typeface="Nunito Sans"/>
+              </a:rPr>
+              <a:t>pruebas</a:t>
             </a:r>
           </a:p>
           <a:p>
@@ -7427,7 +7467,16 @@
                 </a:solidFill>
                 <a:latin typeface="Nunito Sans"/>
               </a:rPr>
-              <a:t>Recuerda la sesión 28: la prueba social</a:t>
+              <a:t>Pregunta: </a:t>
+            </a:r>
+            <a:r>
+              <a:rPr sz="2800" b="1">
+                <a:solidFill>
+                  <a:srgbClr val="1F2A44"/>
+                </a:solidFill>
+                <a:latin typeface="Nunito Sans"/>
+              </a:rPr>
+              <a:t>¿cómo lo sabes? ¿Qué pruebas hay a favor?</a:t>
             </a:r>
           </a:p>
         </p:txBody>
@@ -7492,7 +7541,7 @@
                 </a:solidFill>
                 <a:latin typeface="Nunito Sans"/>
               </a:rPr>
-              <a:t>BLOQUE 1 · ASCH: SEGUIR AL GRUPO (1951)</a:t>
+              <a:t>BLOQUE 1 · DOS FALACIAS SIN PRUEBAS</a:t>
             </a:r>
           </a:p>
         </p:txBody>
@@ -7531,7 +7580,7 @@
                 </a:solidFill>
                 <a:latin typeface="Fredoka"/>
               </a:rPr>
-              <a:t>Así era el experimento de Asch</a:t>
+              <a:t>Razonamiento circular (petitio principii)</a:t>
             </a:r>
           </a:p>
         </p:txBody>
@@ -7544,14 +7593,14 @@
         </p:nvSpPr>
         <p:spPr>
           <a:xfrm>
-            <a:off x="640000" y="1600000"/>
-            <a:ext cx="10912000" cy="1100000"/>
+            <a:off x="640000" y="1650000"/>
+            <a:ext cx="10912000" cy="1150000"/>
           </a:xfrm>
           <a:prstGeom prst="rect">
             <a:avLst/>
           </a:prstGeom>
           <a:solidFill>
-            <a:srgbClr val="FFFFFF"/>
+            <a:srgbClr val="EAF0F7"/>
           </a:solidFill>
           <a:ln>
             <a:noFill/>
@@ -7587,7 +7636,7 @@
         </p:nvSpPr>
         <p:spPr>
           <a:xfrm>
-            <a:off x="840000" y="1650000"/>
+            <a:off x="840000" y="1730000"/>
             <a:ext cx="10512000" cy="1000000"/>
           </a:xfrm>
           <a:prstGeom prst="rect">
@@ -7603,17 +7652,17 @@
           <a:p>
             <a:pPr>
               <a:spcAft>
-                <a:spcPts val="1170"/>
-              </a:spcAft>
-            </a:pPr>
-            <a:r>
-              <a:rPr sz="2600" b="1">
+                <a:spcPts val="1260"/>
+              </a:spcAft>
+            </a:pPr>
+            <a:r>
+              <a:rPr sz="2800" b="1">
                 <a:solidFill>
                   <a:srgbClr val="1F2A44"/>
                 </a:solidFill>
                 <a:latin typeface="Nunito Sans"/>
               </a:rPr>
-              <a:t>Un grupo mira una línea y dice, uno por uno y en voz alta, cuál de otras tres (A, B o C) mide igual. Es facilísimo.</a:t>
+              <a:t>Usar la conclusión como razón: la conclusión ya está escondida en la premisa.</a:t>
             </a:r>
           </a:p>
         </p:txBody>
@@ -7626,8 +7675,8 @@
         </p:nvSpPr>
         <p:spPr>
           <a:xfrm>
-            <a:off x="640000" y="2900000"/>
-            <a:ext cx="10912000" cy="3500000"/>
+            <a:off x="640000" y="3000000"/>
+            <a:ext cx="10912000" cy="3458000"/>
           </a:xfrm>
           <a:prstGeom prst="rect">
             <a:avLst/>
@@ -7642,119 +7691,137 @@
           <a:p>
             <a:pPr>
               <a:spcAft>
-                <a:spcPts val="1080"/>
-              </a:spcAft>
-            </a:pPr>
-            <a:r>
-              <a:rPr sz="2400" b="1">
+                <a:spcPts val="1260"/>
+              </a:spcAft>
+            </a:pPr>
+            <a:r>
+              <a:rPr sz="2800" b="1">
                 <a:solidFill>
                   <a:srgbClr val="E8793A"/>
                 </a:solidFill>
                 <a:latin typeface="Nunito Sans"/>
               </a:rPr>
-              <a:t>1. </a:t>
-            </a:r>
-            <a:r>
-              <a:rPr sz="2400" b="0">
+              <a:t>• </a:t>
+            </a:r>
+            <a:r>
+              <a:rPr sz="2800" b="0">
                 <a:solidFill>
                   <a:srgbClr val="1F2A44"/>
                 </a:solidFill>
                 <a:latin typeface="Nunito Sans"/>
               </a:rPr>
-              <a:t>El truco: todos menos uno eran actores de acuerdo. El participante de verdad contestaba casi el último.</a:t>
-            </a:r>
-          </a:p>
-          <a:p>
-            <a:pPr>
-              <a:spcAft>
-                <a:spcPts val="1080"/>
-              </a:spcAft>
-            </a:pPr>
-            <a:r>
-              <a:rPr sz="2400" b="1">
+              <a:t>También se llama </a:t>
+            </a:r>
+            <a:r>
+              <a:rPr sz="2800" b="1">
+                <a:solidFill>
+                  <a:srgbClr val="1F2A44"/>
+                </a:solidFill>
+                <a:latin typeface="Nunito Sans"/>
+              </a:rPr>
+              <a:t>petición de principio</a:t>
+            </a:r>
+          </a:p>
+          <a:p>
+            <a:pPr>
+              <a:spcAft>
+                <a:spcPts val="1260"/>
+              </a:spcAft>
+            </a:pPr>
+            <a:r>
+              <a:rPr sz="2800" b="1">
                 <a:solidFill>
                   <a:srgbClr val="E8793A"/>
                 </a:solidFill>
                 <a:latin typeface="Nunito Sans"/>
               </a:rPr>
-              <a:t>2. </a:t>
-            </a:r>
-            <a:r>
-              <a:rPr sz="2400" b="0">
+              <a:t>• </a:t>
+            </a:r>
+            <a:r>
+              <a:rPr sz="2800" b="0">
                 <a:solidFill>
                   <a:srgbClr val="1F2A44"/>
                 </a:solidFill>
                 <a:latin typeface="Nunito Sans"/>
               </a:rPr>
-              <a:t>En algunas rondas, los actores daban a propósito la misma respuesta equivocada.</a:t>
-            </a:r>
-          </a:p>
-          <a:p>
-            <a:pPr>
-              <a:spcAft>
-                <a:spcPts val="1080"/>
-              </a:spcAft>
-            </a:pPr>
-            <a:r>
-              <a:rPr sz="2400" b="1">
+              <a:t>Da vueltas en </a:t>
+            </a:r>
+            <a:r>
+              <a:rPr sz="2800" b="1">
+                <a:solidFill>
+                  <a:srgbClr val="1F2A44"/>
+                </a:solidFill>
+                <a:latin typeface="Nunito Sans"/>
+              </a:rPr>
+              <a:t>círculo</a:t>
+            </a:r>
+            <a:r>
+              <a:rPr sz="2800" b="0">
+                <a:solidFill>
+                  <a:srgbClr val="1F2A44"/>
+                </a:solidFill>
+                <a:latin typeface="Nunito Sans"/>
+              </a:rPr>
+              <a:t> y no avanza</a:t>
+            </a:r>
+          </a:p>
+          <a:p>
+            <a:pPr>
+              <a:spcAft>
+                <a:spcPts val="1260"/>
+              </a:spcAft>
+            </a:pPr>
+            <a:r>
+              <a:rPr sz="2800" b="1">
                 <a:solidFill>
                   <a:srgbClr val="E8793A"/>
                 </a:solidFill>
                 <a:latin typeface="Nunito Sans"/>
               </a:rPr>
-              <a:t>3. </a:t>
-            </a:r>
-            <a:r>
-              <a:rPr sz="2400" b="0">
+              <a:t>• </a:t>
+            </a:r>
+            <a:r>
+              <a:rPr sz="2800" b="0">
                 <a:solidFill>
                   <a:srgbClr val="1F2A44"/>
                 </a:solidFill>
                 <a:latin typeface="Nunito Sans"/>
               </a:rPr>
-              <a:t>En esas rondas, 2 de cada 3 respuestas fueron correctas. Pero 1 de cada 3 siguió al grupo.</a:t>
-            </a:r>
-          </a:p>
-          <a:p>
-            <a:pPr>
-              <a:spcAft>
-                <a:spcPts val="1080"/>
-              </a:spcAft>
-            </a:pPr>
-            <a:r>
-              <a:rPr sz="2400" b="1">
+              <a:t>Dice lo mismo con otras palabras</a:t>
+            </a:r>
+          </a:p>
+          <a:p>
+            <a:pPr>
+              <a:spcAft>
+                <a:spcPts val="1260"/>
+              </a:spcAft>
+            </a:pPr>
+            <a:r>
+              <a:rPr sz="2800" b="1">
                 <a:solidFill>
                   <a:srgbClr val="E8793A"/>
                 </a:solidFill>
                 <a:latin typeface="Nunito Sans"/>
               </a:rPr>
-              <a:t>4. </a:t>
-            </a:r>
-            <a:r>
-              <a:rPr sz="2400" b="0">
+              <a:t>• </a:t>
+            </a:r>
+            <a:r>
+              <a:rPr sz="2800" b="0">
                 <a:solidFill>
                   <a:srgbClr val="1F2A44"/>
                 </a:solidFill>
                 <a:latin typeface="Nunito Sans"/>
               </a:rPr>
-              <a:t>Conclusión: unas </a:t>
-            </a:r>
-            <a:r>
-              <a:rPr sz="2400" b="1">
+              <a:t>Pregunta: </a:t>
+            </a:r>
+            <a:r>
+              <a:rPr sz="2800" b="1">
                 <a:solidFill>
                   <a:srgbClr val="1F2A44"/>
                 </a:solidFill>
                 <a:latin typeface="Nunito Sans"/>
               </a:rPr>
-              <a:t>3 de cada 4</a:t>
-            </a:r>
-            <a:r>
-              <a:rPr sz="2400" b="0">
-                <a:solidFill>
-                  <a:srgbClr val="1F2A44"/>
-                </a:solidFill>
-                <a:latin typeface="Nunito Sans"/>
-              </a:rPr>
-              <a:t> personas cedieron alguna vez; 1 de cada 4, nunca. Con un aliado, casi todos resistían.</a:t>
+              <a:t>¿la razón dice algo distinto de la conclusión?</a:t>
             </a:r>
           </a:p>
         </p:txBody>
@@ -7768,6 +7835,341 @@
 </file>
 
 <file path=ppt/slides/slide8.xml><?xml version="1.0" encoding="utf-8"?>
+<p:sld xmlns:a="http://schemas.openxmlformats.org/drawingml/2006/main" xmlns:p="http://schemas.openxmlformats.org/presentationml/2006/main" xmlns:r="http://schemas.openxmlformats.org/officeDocument/2006/relationships">
+  <p:cSld>
+    <p:bg>
+      <p:bgPr>
+        <a:solidFill>
+          <a:srgbClr val="FBF7EF"/>
+        </a:solidFill>
+        <a:effectLst/>
+      </p:bgPr>
+    </p:bg>
+    <p:spTree>
+      <p:nvGrpSpPr>
+        <p:cNvPr id="1" name=""/>
+        <p:cNvGrpSpPr/>
+        <p:nvPr/>
+      </p:nvGrpSpPr>
+      <p:grpSpPr/>
+      <p:sp>
+        <p:nvSpPr>
+          <p:cNvPr id="2" name="TextBox 1"/>
+          <p:cNvSpPr txBox="1"/>
+          <p:nvPr/>
+        </p:nvSpPr>
+        <p:spPr>
+          <a:xfrm>
+            <a:off x="640000" y="380000"/>
+            <a:ext cx="10912000" cy="420000"/>
+          </a:xfrm>
+          <a:prstGeom prst="rect">
+            <a:avLst/>
+          </a:prstGeom>
+          <a:noFill/>
+        </p:spPr>
+        <p:txBody>
+          <a:bodyPr wrap="square">
+            <a:spAutoFit/>
+          </a:bodyPr>
+          <a:lstStyle/>
+          <a:p>
+            <a:pPr>
+              <a:spcAft>
+                <a:spcPts val="630"/>
+              </a:spcAft>
+            </a:pPr>
+            <a:r>
+              <a:rPr sz="1400" b="1">
+                <a:solidFill>
+                  <a:srgbClr val="E8793A"/>
+                </a:solidFill>
+                <a:latin typeface="Nunito Sans"/>
+              </a:rPr>
+              <a:t>BLOQUE 1 · DOS FALACIAS SIN PRUEBAS</a:t>
+            </a:r>
+          </a:p>
+        </p:txBody>
+      </p:sp>
+      <p:sp>
+        <p:nvSpPr>
+          <p:cNvPr id="3" name="TextBox 2"/>
+          <p:cNvSpPr txBox="1"/>
+          <p:nvPr/>
+        </p:nvSpPr>
+        <p:spPr>
+          <a:xfrm>
+            <a:off x="640000" y="760000"/>
+            <a:ext cx="10912000" cy="800000"/>
+          </a:xfrm>
+          <a:prstGeom prst="rect">
+            <a:avLst/>
+          </a:prstGeom>
+          <a:noFill/>
+        </p:spPr>
+        <p:txBody>
+          <a:bodyPr wrap="square">
+            <a:spAutoFit/>
+          </a:bodyPr>
+          <a:lstStyle/>
+          <a:p>
+            <a:pPr>
+              <a:spcAft>
+                <a:spcPts val="1710"/>
+              </a:spcAft>
+            </a:pPr>
+            <a:r>
+              <a:rPr sz="3800" b="1">
+                <a:solidFill>
+                  <a:srgbClr val="1F2A44"/>
+                </a:solidFill>
+                <a:latin typeface="Fredoka"/>
+              </a:rPr>
+              <a:t>Las dos, de un vistazo</a:t>
+            </a:r>
+          </a:p>
+        </p:txBody>
+      </p:sp>
+      <p:graphicFrame>
+        <p:nvGraphicFramePr>
+          <p:cNvPr id="4" name="Table 3"/>
+          <p:cNvGraphicFramePr>
+            <a:graphicFrameLocks noGrp="1"/>
+          </p:cNvGraphicFramePr>
+          <p:nvPr/>
+        </p:nvGraphicFramePr>
+        <p:xfrm>
+          <a:off x="640000" y="1700000"/>
+          <a:ext cx="10912000" cy="1800000"/>
+        </p:xfrm>
+        <a:graphic>
+          <a:graphicData uri="http://schemas.openxmlformats.org/drawingml/2006/table">
+            <a:tbl>
+              <a:tblPr firstRow="1" bandRow="1">
+                <a:tableStyleId>{5C22544A-7EE6-4342-B048-85BDC9FD1C3A}</a:tableStyleId>
+              </a:tblPr>
+              <a:tblGrid>
+                <a:gridCol w="3637333"/>
+                <a:gridCol w="3637333"/>
+                <a:gridCol w="3637334"/>
+              </a:tblGrid>
+              <a:tr h="600000">
+                <a:tc>
+                  <a:txBody>
+                    <a:bodyPr/>
+                    <a:lstStyle/>
+                    <a:p>
+                      <a:r>
+                        <a:rPr sz="2000" b="1">
+                          <a:solidFill>
+                            <a:srgbClr val="FBF7EF"/>
+                          </a:solidFill>
+                          <a:latin typeface="Fredoka"/>
+                        </a:rPr>
+                        <a:t>Falacia</a:t>
+                      </a:r>
+                    </a:p>
+                  </a:txBody>
+                  <a:tcPr>
+                    <a:solidFill>
+                      <a:srgbClr val="1F2A44"/>
+                    </a:solidFill>
+                  </a:tcPr>
+                </a:tc>
+                <a:tc>
+                  <a:txBody>
+                    <a:bodyPr/>
+                    <a:lstStyle/>
+                    <a:p>
+                      <a:r>
+                        <a:rPr sz="2000" b="1">
+                          <a:solidFill>
+                            <a:srgbClr val="FBF7EF"/>
+                          </a:solidFill>
+                          <a:latin typeface="Fredoka"/>
+                        </a:rPr>
+                        <a:t>Esquema</a:t>
+                      </a:r>
+                    </a:p>
+                  </a:txBody>
+                  <a:tcPr>
+                    <a:solidFill>
+                      <a:srgbClr val="1F2A44"/>
+                    </a:solidFill>
+                  </a:tcPr>
+                </a:tc>
+                <a:tc>
+                  <a:txBody>
+                    <a:bodyPr/>
+                    <a:lstStyle/>
+                    <a:p>
+                      <a:r>
+                        <a:rPr sz="2000" b="1">
+                          <a:solidFill>
+                            <a:srgbClr val="FBF7EF"/>
+                          </a:solidFill>
+                          <a:latin typeface="Fredoka"/>
+                        </a:rPr>
+                        <a:t>Ejemplo</a:t>
+                      </a:r>
+                    </a:p>
+                  </a:txBody>
+                  <a:tcPr>
+                    <a:solidFill>
+                      <a:srgbClr val="1F2A44"/>
+                    </a:solidFill>
+                  </a:tcPr>
+                </a:tc>
+              </a:tr>
+              <a:tr h="600000">
+                <a:tc>
+                  <a:txBody>
+                    <a:bodyPr/>
+                    <a:lstStyle/>
+                    <a:p>
+                      <a:r>
+                        <a:rPr sz="2000" b="0">
+                          <a:solidFill>
+                            <a:srgbClr val="1F2A44"/>
+                          </a:solidFill>
+                          <a:latin typeface="Nunito Sans"/>
+                        </a:rPr>
+                        <a:t>Ignorancia</a:t>
+                      </a:r>
+                    </a:p>
+                  </a:txBody>
+                  <a:tcPr>
+                    <a:solidFill>
+                      <a:srgbClr val="FFFFFF"/>
+                    </a:solidFill>
+                  </a:tcPr>
+                </a:tc>
+                <a:tc>
+                  <a:txBody>
+                    <a:bodyPr/>
+                    <a:lstStyle/>
+                    <a:p>
+                      <a:r>
+                        <a:rPr sz="2000" b="0">
+                          <a:solidFill>
+                            <a:srgbClr val="1F2A44"/>
+                          </a:solidFill>
+                          <a:latin typeface="Nunito Sans"/>
+                        </a:rPr>
+                        <a:t>Nadie ha demostrado que no, luego sí</a:t>
+                      </a:r>
+                    </a:p>
+                  </a:txBody>
+                  <a:tcPr>
+                    <a:solidFill>
+                      <a:srgbClr val="FFFFFF"/>
+                    </a:solidFill>
+                  </a:tcPr>
+                </a:tc>
+                <a:tc>
+                  <a:txBody>
+                    <a:bodyPr/>
+                    <a:lstStyle/>
+                    <a:p>
+                      <a:r>
+                        <a:rPr sz="2000" b="0">
+                          <a:solidFill>
+                            <a:srgbClr val="1F2A44"/>
+                          </a:solidFill>
+                          <a:latin typeface="Nunito Sans"/>
+                        </a:rPr>
+                        <a:t>«Nadie ha probado que el horóscopo falle»</a:t>
+                      </a:r>
+                    </a:p>
+                  </a:txBody>
+                  <a:tcPr>
+                    <a:solidFill>
+                      <a:srgbClr val="FFFFFF"/>
+                    </a:solidFill>
+                  </a:tcPr>
+                </a:tc>
+              </a:tr>
+              <a:tr h="600000">
+                <a:tc>
+                  <a:txBody>
+                    <a:bodyPr/>
+                    <a:lstStyle/>
+                    <a:p>
+                      <a:r>
+                        <a:rPr sz="2000" b="0">
+                          <a:solidFill>
+                            <a:srgbClr val="1F2A44"/>
+                          </a:solidFill>
+                          <a:latin typeface="Nunito Sans"/>
+                        </a:rPr>
+                        <a:t>Circular</a:t>
+                      </a:r>
+                    </a:p>
+                  </a:txBody>
+                  <a:tcPr>
+                    <a:solidFill>
+                      <a:srgbClr val="EAF0F7"/>
+                    </a:solidFill>
+                  </a:tcPr>
+                </a:tc>
+                <a:tc>
+                  <a:txBody>
+                    <a:bodyPr/>
+                    <a:lstStyle/>
+                    <a:p>
+                      <a:r>
+                        <a:rPr sz="2000" b="0">
+                          <a:solidFill>
+                            <a:srgbClr val="1F2A44"/>
+                          </a:solidFill>
+                          <a:latin typeface="Nunito Sans"/>
+                        </a:rPr>
+                        <a:t>A es verdad porque A</a:t>
+                      </a:r>
+                    </a:p>
+                  </a:txBody>
+                  <a:tcPr>
+                    <a:solidFill>
+                      <a:srgbClr val="EAF0F7"/>
+                    </a:solidFill>
+                  </a:tcPr>
+                </a:tc>
+                <a:tc>
+                  <a:txBody>
+                    <a:bodyPr/>
+                    <a:lstStyle/>
+                    <a:p>
+                      <a:r>
+                        <a:rPr sz="2000" b="0">
+                          <a:solidFill>
+                            <a:srgbClr val="1F2A44"/>
+                          </a:solidFill>
+                          <a:latin typeface="Nunito Sans"/>
+                        </a:rPr>
+                        <a:t>«Es el mejor youtuber porque nadie es mejor»</a:t>
+                      </a:r>
+                    </a:p>
+                  </a:txBody>
+                  <a:tcPr>
+                    <a:solidFill>
+                      <a:srgbClr val="EAF0F7"/>
+                    </a:solidFill>
+                  </a:tcPr>
+                </a:tc>
+              </a:tr>
+            </a:tbl>
+          </a:graphicData>
+        </a:graphic>
+      </p:graphicFrame>
+    </p:spTree>
+  </p:cSld>
+  <p:clrMapOvr>
+    <a:masterClrMapping/>
+  </p:clrMapOvr>
+</p:sld>
+</file>
+
+<file path=ppt/slides/slide9.xml><?xml version="1.0" encoding="utf-8"?>
 <p:sld xmlns:a="http://schemas.openxmlformats.org/drawingml/2006/main" xmlns:p="http://schemas.openxmlformats.org/presentationml/2006/main" xmlns:r="http://schemas.openxmlformats.org/officeDocument/2006/relationships">
   <p:cSld>
     <p:bg>
@@ -7858,300 +8260,7 @@
                 </a:solidFill>
                 <a:latin typeface="Fredoka"/>
               </a:rPr>
-              <a:t>Milgram: obedecer a una autoridad (1961-1962)</a:t>
-            </a:r>
-          </a:p>
-        </p:txBody>
-      </p:sp>
-    </p:spTree>
-  </p:cSld>
-  <p:clrMapOvr>
-    <a:masterClrMapping/>
-  </p:clrMapOvr>
-</p:sld>
-</file>
-
-<file path=ppt/slides/slide9.xml><?xml version="1.0" encoding="utf-8"?>
-<p:sld xmlns:a="http://schemas.openxmlformats.org/drawingml/2006/main" xmlns:p="http://schemas.openxmlformats.org/presentationml/2006/main" xmlns:r="http://schemas.openxmlformats.org/officeDocument/2006/relationships">
-  <p:cSld>
-    <p:bg>
-      <p:bgPr>
-        <a:solidFill>
-          <a:srgbClr val="FBF7EF"/>
-        </a:solidFill>
-        <a:effectLst/>
-      </p:bgPr>
-    </p:bg>
-    <p:spTree>
-      <p:nvGrpSpPr>
-        <p:cNvPr id="1" name=""/>
-        <p:cNvGrpSpPr/>
-        <p:nvPr/>
-      </p:nvGrpSpPr>
-      <p:grpSpPr/>
-      <p:sp>
-        <p:nvSpPr>
-          <p:cNvPr id="2" name="TextBox 1"/>
-          <p:cNvSpPr txBox="1"/>
-          <p:nvPr/>
-        </p:nvSpPr>
-        <p:spPr>
-          <a:xfrm>
-            <a:off x="640000" y="380000"/>
-            <a:ext cx="10912000" cy="420000"/>
-          </a:xfrm>
-          <a:prstGeom prst="rect">
-            <a:avLst/>
-          </a:prstGeom>
-          <a:noFill/>
-        </p:spPr>
-        <p:txBody>
-          <a:bodyPr wrap="square">
-            <a:spAutoFit/>
-          </a:bodyPr>
-          <a:lstStyle/>
-          <a:p>
-            <a:pPr>
-              <a:spcAft>
-                <a:spcPts val="630"/>
-              </a:spcAft>
-            </a:pPr>
-            <a:r>
-              <a:rPr sz="1400" b="1">
-                <a:solidFill>
-                  <a:srgbClr val="E8793A"/>
-                </a:solidFill>
-                <a:latin typeface="Nunito Sans"/>
-              </a:rPr>
-              <a:t>BLOQUE 2 · MILGRAM: OBEDECER A UNA AUTORIDAD (1961-1962)</a:t>
-            </a:r>
-          </a:p>
-        </p:txBody>
-      </p:sp>
-      <p:sp>
-        <p:nvSpPr>
-          <p:cNvPr id="3" name="TextBox 2"/>
-          <p:cNvSpPr txBox="1"/>
-          <p:nvPr/>
-        </p:nvSpPr>
-        <p:spPr>
-          <a:xfrm>
-            <a:off x="640000" y="760000"/>
-            <a:ext cx="10912000" cy="800000"/>
-          </a:xfrm>
-          <a:prstGeom prst="rect">
-            <a:avLst/>
-          </a:prstGeom>
-          <a:noFill/>
-        </p:spPr>
-        <p:txBody>
-          <a:bodyPr wrap="square">
-            <a:spAutoFit/>
-          </a:bodyPr>
-          <a:lstStyle/>
-          <a:p>
-            <a:pPr>
-              <a:spcAft>
-                <a:spcPts val="1710"/>
-              </a:spcAft>
-            </a:pPr>
-            <a:r>
-              <a:rPr sz="3800" b="1">
-                <a:solidFill>
-                  <a:srgbClr val="1F2A44"/>
-                </a:solidFill>
-                <a:latin typeface="Fredoka"/>
-              </a:rPr>
-              <a:t>Obediencia</a:t>
-            </a:r>
-          </a:p>
-        </p:txBody>
-      </p:sp>
-      <p:sp>
-        <p:nvSpPr>
-          <p:cNvPr id="4" name="Rectangle 3"/>
-          <p:cNvSpPr/>
-          <p:nvPr/>
-        </p:nvSpPr>
-        <p:spPr>
-          <a:xfrm>
-            <a:off x="640000" y="1650000"/>
-            <a:ext cx="10912000" cy="1150000"/>
-          </a:xfrm>
-          <a:prstGeom prst="rect">
-            <a:avLst/>
-          </a:prstGeom>
-          <a:solidFill>
-            <a:srgbClr val="EAF0F7"/>
-          </a:solidFill>
-          <a:ln>
-            <a:noFill/>
-          </a:ln>
-        </p:spPr>
-        <p:style>
-          <a:lnRef idx="1">
-            <a:schemeClr val="accent1"/>
-          </a:lnRef>
-          <a:fillRef idx="3">
-            <a:schemeClr val="accent1"/>
-          </a:fillRef>
-          <a:effectRef idx="2">
-            <a:schemeClr val="accent1"/>
-          </a:effectRef>
-          <a:fontRef idx="minor">
-            <a:schemeClr val="lt1"/>
-          </a:fontRef>
-        </p:style>
-        <p:txBody>
-          <a:bodyPr rtlCol="0" anchor="ctr"/>
-          <a:lstStyle/>
-          <a:p>
-            <a:pPr algn="ctr"/>
-          </a:p>
-        </p:txBody>
-      </p:sp>
-      <p:sp>
-        <p:nvSpPr>
-          <p:cNvPr id="5" name="TextBox 4"/>
-          <p:cNvSpPr txBox="1"/>
-          <p:nvPr/>
-        </p:nvSpPr>
-        <p:spPr>
-          <a:xfrm>
-            <a:off x="840000" y="1730000"/>
-            <a:ext cx="10512000" cy="1000000"/>
-          </a:xfrm>
-          <a:prstGeom prst="rect">
-            <a:avLst/>
-          </a:prstGeom>
-          <a:noFill/>
-        </p:spPr>
-        <p:txBody>
-          <a:bodyPr wrap="square" anchor="ctr">
-            <a:spAutoFit/>
-          </a:bodyPr>
-          <a:lstStyle/>
-          <a:p>
-            <a:pPr>
-              <a:spcAft>
-                <a:spcPts val="1260"/>
-              </a:spcAft>
-            </a:pPr>
-            <a:r>
-              <a:rPr sz="2800" b="1">
-                <a:solidFill>
-                  <a:srgbClr val="1F2A44"/>
-                </a:solidFill>
-                <a:latin typeface="Nunito Sans"/>
-              </a:rPr>
-              <a:t>La obediencia es hacer lo que manda una autoridad, aunque no estemos de acuerdo.</a:t>
-            </a:r>
-          </a:p>
-        </p:txBody>
-      </p:sp>
-      <p:sp>
-        <p:nvSpPr>
-          <p:cNvPr id="6" name="TextBox 5"/>
-          <p:cNvSpPr txBox="1"/>
-          <p:nvPr/>
-        </p:nvSpPr>
-        <p:spPr>
-          <a:xfrm>
-            <a:off x="640000" y="3000000"/>
-            <a:ext cx="10912000" cy="3458000"/>
-          </a:xfrm>
-          <a:prstGeom prst="rect">
-            <a:avLst/>
-          </a:prstGeom>
-          <a:noFill/>
-        </p:spPr>
-        <p:txBody>
-          <a:bodyPr wrap="square">
-            <a:spAutoFit/>
-          </a:bodyPr>
-          <a:lstStyle/>
-          <a:p>
-            <a:pPr>
-              <a:spcAft>
-                <a:spcPts val="1260"/>
-              </a:spcAft>
-            </a:pPr>
-            <a:r>
-              <a:rPr sz="2800" b="1">
-                <a:solidFill>
-                  <a:srgbClr val="E8793A"/>
-                </a:solidFill>
-                <a:latin typeface="Nunito Sans"/>
-              </a:rPr>
-              <a:t>• </a:t>
-            </a:r>
-            <a:r>
-              <a:rPr sz="2800" b="0">
-                <a:solidFill>
-                  <a:srgbClr val="1F2A44"/>
-                </a:solidFill>
-                <a:latin typeface="Nunito Sans"/>
-              </a:rPr>
-              <a:t>Obedecer normas justas es necesario para convivir</a:t>
-            </a:r>
-          </a:p>
-          <a:p>
-            <a:pPr>
-              <a:spcAft>
-                <a:spcPts val="1260"/>
-              </a:spcAft>
-            </a:pPr>
-            <a:r>
-              <a:rPr sz="2800" b="1">
-                <a:solidFill>
-                  <a:srgbClr val="E8793A"/>
-                </a:solidFill>
-                <a:latin typeface="Nunito Sans"/>
-              </a:rPr>
-              <a:t>• </a:t>
-            </a:r>
-            <a:r>
-              <a:rPr sz="2800" b="0">
-                <a:solidFill>
-                  <a:srgbClr val="1F2A44"/>
-                </a:solidFill>
-                <a:latin typeface="Nunito Sans"/>
-              </a:rPr>
-              <a:t>El problema es obedecer </a:t>
-            </a:r>
-            <a:r>
-              <a:rPr sz="2800" b="1">
-                <a:solidFill>
-                  <a:srgbClr val="1F2A44"/>
-                </a:solidFill>
-                <a:latin typeface="Nunito Sans"/>
-              </a:rPr>
-              <a:t>sin pensar</a:t>
-            </a:r>
-          </a:p>
-          <a:p>
-            <a:pPr>
-              <a:spcAft>
-                <a:spcPts val="1260"/>
-              </a:spcAft>
-            </a:pPr>
-            <a:r>
-              <a:rPr sz="2800" b="1">
-                <a:solidFill>
-                  <a:srgbClr val="E8793A"/>
-                </a:solidFill>
-                <a:latin typeface="Nunito Sans"/>
-              </a:rPr>
-              <a:t>• </a:t>
-            </a:r>
-            <a:r>
-              <a:rPr sz="2800" b="0">
-                <a:solidFill>
-                  <a:srgbClr val="1F2A44"/>
-                </a:solidFill>
-                <a:latin typeface="Nunito Sans"/>
-              </a:rPr>
-              <a:t>Recuerda la sesión 25: autoridad por poder</a:t>
+              <a:t>Casos resueltos</a:t>
             </a:r>
           </a:p>
         </p:txBody>
